--- a/presentations/Отравления.pptx
+++ b/presentations/Отравления.pptx
@@ -16,6 +16,10 @@
     <p:sldId id="264" r:id="rId15"/>
     <p:sldId id="265" r:id="rId16"/>
     <p:sldId id="266" r:id="rId17"/>
+    <p:sldId id="267" r:id="rId18"/>
+    <p:sldId id="268" r:id="rId19"/>
+    <p:sldId id="269" r:id="rId20"/>
+    <p:sldId id="270" r:id="rId21"/>
   </p:sldIdLst>
   <p:sldSz cx="12191695" cy="6858000" type="screen4x3"/>
   <p:notesSz cx="6858000" cy="9144000"/>
@@ -3437,7 +3441,7 @@
                 <a:ea typeface="Open Sans"/>
                 <a:cs typeface="Open Sans"/>
               </a:rPr>
-              <a:t>ПАМЯТКА</a:t>
+              <a:t>ЯД НА КОЖЕ ИЛИ В ГЛАЗАХ</a:t>
             </a:r>
           </a:p>
         </p:txBody>
@@ -3602,30 +3606,1058 @@
           </a:p>
         </p:txBody>
       </p:sp>
-      <p:pic>
-        <p:nvPicPr>
-          <p:cNvPr id="8" name="Picture 7" descr="pamyatka-tema4-otravleniya-16x9.png"/>
-          <p:cNvPicPr>
-            <a:picLocks noChangeAspect="1"/>
-          </p:cNvPicPr>
-          <p:nvPr/>
-        </p:nvPicPr>
-        <p:blipFill>
-          <a:blip r:embed="rId2"/>
-          <a:stretch>
-            <a:fillRect/>
-          </a:stretch>
-        </p:blipFill>
-        <p:spPr>
-          <a:xfrm>
-            <a:off x="2300000" y="1400000"/>
-            <a:ext cx="7800000" cy="5200000"/>
-          </a:xfrm>
-          <a:prstGeom prst="rect">
-            <a:avLst/>
-          </a:prstGeom>
-        </p:spPr>
-      </p:pic>
+      <p:sp>
+        <p:nvSpPr>
+          <p:cNvPr id="8" name="Oval 7"/>
+          <p:cNvSpPr/>
+          <p:nvPr/>
+        </p:nvSpPr>
+        <p:spPr>
+          <a:xfrm>
+            <a:off x="700000" y="1400000"/>
+            <a:ext cx="500000" cy="500000"/>
+          </a:xfrm>
+          <a:prstGeom prst="ellipse">
+            <a:avLst/>
+          </a:prstGeom>
+          <a:solidFill>
+            <a:srgbClr val="CC0000"/>
+          </a:solidFill>
+          <a:ln>
+            <a:noFill/>
+          </a:ln>
+        </p:spPr>
+        <p:style>
+          <a:lnRef idx="1">
+            <a:schemeClr val="accent1"/>
+          </a:lnRef>
+          <a:fillRef idx="3">
+            <a:schemeClr val="accent1"/>
+          </a:fillRef>
+          <a:effectRef idx="2">
+            <a:schemeClr val="accent1"/>
+          </a:effectRef>
+          <a:fontRef idx="minor">
+            <a:schemeClr val="lt1"/>
+          </a:fontRef>
+        </p:style>
+        <p:txBody>
+          <a:bodyPr rtlCol="0" anchor="ctr"/>
+          <a:lstStyle/>
+          <a:p>
+            <a:pPr algn="ctr"/>
+          </a:p>
+        </p:txBody>
+      </p:sp>
+      <p:sp>
+        <p:nvSpPr>
+          <p:cNvPr id="9" name="TextBox 8"/>
+          <p:cNvSpPr txBox="1"/>
+          <p:nvPr/>
+        </p:nvSpPr>
+        <p:spPr>
+          <a:xfrm>
+            <a:off x="700000" y="1400000"/>
+            <a:ext cx="500000" cy="500000"/>
+          </a:xfrm>
+          <a:prstGeom prst="rect">
+            <a:avLst/>
+          </a:prstGeom>
+          <a:noFill/>
+        </p:spPr>
+        <p:txBody>
+          <a:bodyPr wrap="square" anchor="ctr">
+            <a:spAutoFit/>
+          </a:bodyPr>
+          <a:lstStyle/>
+          <a:p>
+            <a:pPr algn="ctr"/>
+            <a:r>
+              <a:rPr sz="1300" b="1">
+                <a:solidFill>
+                  <a:srgbClr val="FFFFFF"/>
+                </a:solidFill>
+                <a:latin typeface="Open Sans"/>
+                <a:ea typeface="Open Sans"/>
+                <a:cs typeface="Open Sans"/>
+              </a:rPr>
+              <a:t>1</a:t>
+            </a:r>
+          </a:p>
+        </p:txBody>
+      </p:sp>
+      <p:sp>
+        <p:nvSpPr>
+          <p:cNvPr id="10" name="Rectangle 9"/>
+          <p:cNvSpPr/>
+          <p:nvPr/>
+        </p:nvSpPr>
+        <p:spPr>
+          <a:xfrm>
+            <a:off x="1400000" y="1400000"/>
+            <a:ext cx="10550000" cy="620000"/>
+          </a:xfrm>
+          <a:prstGeom prst="rect">
+            <a:avLst/>
+          </a:prstGeom>
+          <a:solidFill>
+            <a:srgbClr val="FFFFFF"/>
+          </a:solidFill>
+          <a:ln w="12700">
+            <a:solidFill>
+              <a:srgbClr val="999999"/>
+            </a:solidFill>
+          </a:ln>
+        </p:spPr>
+        <p:style>
+          <a:lnRef idx="1">
+            <a:schemeClr val="accent1"/>
+          </a:lnRef>
+          <a:fillRef idx="3">
+            <a:schemeClr val="accent1"/>
+          </a:fillRef>
+          <a:effectRef idx="2">
+            <a:schemeClr val="accent1"/>
+          </a:effectRef>
+          <a:fontRef idx="minor">
+            <a:schemeClr val="lt1"/>
+          </a:fontRef>
+        </p:style>
+        <p:txBody>
+          <a:bodyPr rtlCol="0" anchor="ctr"/>
+          <a:lstStyle/>
+          <a:p>
+            <a:pPr algn="ctr"/>
+          </a:p>
+        </p:txBody>
+      </p:sp>
+      <p:sp>
+        <p:nvSpPr>
+          <p:cNvPr id="11" name="TextBox 10"/>
+          <p:cNvSpPr txBox="1"/>
+          <p:nvPr/>
+        </p:nvSpPr>
+        <p:spPr>
+          <a:xfrm>
+            <a:off x="1600000" y="1400000"/>
+            <a:ext cx="10150000" cy="620000"/>
+          </a:xfrm>
+          <a:prstGeom prst="rect">
+            <a:avLst/>
+          </a:prstGeom>
+          <a:noFill/>
+        </p:spPr>
+        <p:txBody>
+          <a:bodyPr wrap="square" anchor="ctr">
+            <a:spAutoFit/>
+          </a:bodyPr>
+          <a:lstStyle/>
+          <a:p>
+            <a:pPr algn="l"/>
+            <a:r>
+              <a:rPr sz="1300" b="0">
+                <a:solidFill>
+                  <a:srgbClr val="333333"/>
+                </a:solidFill>
+                <a:latin typeface="Open Sans"/>
+                <a:ea typeface="Open Sans"/>
+                <a:cs typeface="Open Sans"/>
+              </a:rPr>
+              <a:t>Наденьте перчатки и исключите прямой контакт с веществом.</a:t>
+            </a:r>
+          </a:p>
+        </p:txBody>
+      </p:sp>
+      <p:sp>
+        <p:nvSpPr>
+          <p:cNvPr id="12" name="Oval 11"/>
+          <p:cNvSpPr/>
+          <p:nvPr/>
+        </p:nvSpPr>
+        <p:spPr>
+          <a:xfrm>
+            <a:off x="700000" y="2100000"/>
+            <a:ext cx="500000" cy="500000"/>
+          </a:xfrm>
+          <a:prstGeom prst="ellipse">
+            <a:avLst/>
+          </a:prstGeom>
+          <a:solidFill>
+            <a:srgbClr val="555555"/>
+          </a:solidFill>
+          <a:ln>
+            <a:noFill/>
+          </a:ln>
+        </p:spPr>
+        <p:style>
+          <a:lnRef idx="1">
+            <a:schemeClr val="accent1"/>
+          </a:lnRef>
+          <a:fillRef idx="3">
+            <a:schemeClr val="accent1"/>
+          </a:fillRef>
+          <a:effectRef idx="2">
+            <a:schemeClr val="accent1"/>
+          </a:effectRef>
+          <a:fontRef idx="minor">
+            <a:schemeClr val="lt1"/>
+          </a:fontRef>
+        </p:style>
+        <p:txBody>
+          <a:bodyPr rtlCol="0" anchor="ctr"/>
+          <a:lstStyle/>
+          <a:p>
+            <a:pPr algn="ctr"/>
+          </a:p>
+        </p:txBody>
+      </p:sp>
+      <p:sp>
+        <p:nvSpPr>
+          <p:cNvPr id="13" name="TextBox 12"/>
+          <p:cNvSpPr txBox="1"/>
+          <p:nvPr/>
+        </p:nvSpPr>
+        <p:spPr>
+          <a:xfrm>
+            <a:off x="700000" y="2100000"/>
+            <a:ext cx="500000" cy="500000"/>
+          </a:xfrm>
+          <a:prstGeom prst="rect">
+            <a:avLst/>
+          </a:prstGeom>
+          <a:noFill/>
+        </p:spPr>
+        <p:txBody>
+          <a:bodyPr wrap="square" anchor="ctr">
+            <a:spAutoFit/>
+          </a:bodyPr>
+          <a:lstStyle/>
+          <a:p>
+            <a:pPr algn="ctr"/>
+            <a:r>
+              <a:rPr sz="1300" b="1">
+                <a:solidFill>
+                  <a:srgbClr val="FFFFFF"/>
+                </a:solidFill>
+                <a:latin typeface="Open Sans"/>
+                <a:ea typeface="Open Sans"/>
+                <a:cs typeface="Open Sans"/>
+              </a:rPr>
+              <a:t>2</a:t>
+            </a:r>
+          </a:p>
+        </p:txBody>
+      </p:sp>
+      <p:sp>
+        <p:nvSpPr>
+          <p:cNvPr id="14" name="Rectangle 13"/>
+          <p:cNvSpPr/>
+          <p:nvPr/>
+        </p:nvSpPr>
+        <p:spPr>
+          <a:xfrm>
+            <a:off x="1400000" y="2100000"/>
+            <a:ext cx="10550000" cy="620000"/>
+          </a:xfrm>
+          <a:prstGeom prst="rect">
+            <a:avLst/>
+          </a:prstGeom>
+          <a:solidFill>
+            <a:srgbClr val="FFFFFF"/>
+          </a:solidFill>
+          <a:ln w="12700">
+            <a:solidFill>
+              <a:srgbClr val="999999"/>
+            </a:solidFill>
+          </a:ln>
+        </p:spPr>
+        <p:style>
+          <a:lnRef idx="1">
+            <a:schemeClr val="accent1"/>
+          </a:lnRef>
+          <a:fillRef idx="3">
+            <a:schemeClr val="accent1"/>
+          </a:fillRef>
+          <a:effectRef idx="2">
+            <a:schemeClr val="accent1"/>
+          </a:effectRef>
+          <a:fontRef idx="minor">
+            <a:schemeClr val="lt1"/>
+          </a:fontRef>
+        </p:style>
+        <p:txBody>
+          <a:bodyPr rtlCol="0" anchor="ctr"/>
+          <a:lstStyle/>
+          <a:p>
+            <a:pPr algn="ctr"/>
+          </a:p>
+        </p:txBody>
+      </p:sp>
+      <p:sp>
+        <p:nvSpPr>
+          <p:cNvPr id="15" name="TextBox 14"/>
+          <p:cNvSpPr txBox="1"/>
+          <p:nvPr/>
+        </p:nvSpPr>
+        <p:spPr>
+          <a:xfrm>
+            <a:off x="1600000" y="2100000"/>
+            <a:ext cx="10150000" cy="620000"/>
+          </a:xfrm>
+          <a:prstGeom prst="rect">
+            <a:avLst/>
+          </a:prstGeom>
+          <a:noFill/>
+        </p:spPr>
+        <p:txBody>
+          <a:bodyPr wrap="square" anchor="ctr">
+            <a:spAutoFit/>
+          </a:bodyPr>
+          <a:lstStyle/>
+          <a:p>
+            <a:pPr algn="l"/>
+            <a:r>
+              <a:rPr sz="1300" b="0">
+                <a:solidFill>
+                  <a:srgbClr val="333333"/>
+                </a:solidFill>
+                <a:latin typeface="Open Sans"/>
+                <a:ea typeface="Open Sans"/>
+                <a:cs typeface="Open Sans"/>
+              </a:rPr>
+              <a:t>Снимите загрязненную одежду, обувь и украшения.</a:t>
+            </a:r>
+          </a:p>
+        </p:txBody>
+      </p:sp>
+      <p:sp>
+        <p:nvSpPr>
+          <p:cNvPr id="16" name="Oval 15"/>
+          <p:cNvSpPr/>
+          <p:nvPr/>
+        </p:nvSpPr>
+        <p:spPr>
+          <a:xfrm>
+            <a:off x="700000" y="2800000"/>
+            <a:ext cx="500000" cy="500000"/>
+          </a:xfrm>
+          <a:prstGeom prst="ellipse">
+            <a:avLst/>
+          </a:prstGeom>
+          <a:solidFill>
+            <a:srgbClr val="555555"/>
+          </a:solidFill>
+          <a:ln>
+            <a:noFill/>
+          </a:ln>
+        </p:spPr>
+        <p:style>
+          <a:lnRef idx="1">
+            <a:schemeClr val="accent1"/>
+          </a:lnRef>
+          <a:fillRef idx="3">
+            <a:schemeClr val="accent1"/>
+          </a:fillRef>
+          <a:effectRef idx="2">
+            <a:schemeClr val="accent1"/>
+          </a:effectRef>
+          <a:fontRef idx="minor">
+            <a:schemeClr val="lt1"/>
+          </a:fontRef>
+        </p:style>
+        <p:txBody>
+          <a:bodyPr rtlCol="0" anchor="ctr"/>
+          <a:lstStyle/>
+          <a:p>
+            <a:pPr algn="ctr"/>
+          </a:p>
+        </p:txBody>
+      </p:sp>
+      <p:sp>
+        <p:nvSpPr>
+          <p:cNvPr id="17" name="TextBox 16"/>
+          <p:cNvSpPr txBox="1"/>
+          <p:nvPr/>
+        </p:nvSpPr>
+        <p:spPr>
+          <a:xfrm>
+            <a:off x="700000" y="2800000"/>
+            <a:ext cx="500000" cy="500000"/>
+          </a:xfrm>
+          <a:prstGeom prst="rect">
+            <a:avLst/>
+          </a:prstGeom>
+          <a:noFill/>
+        </p:spPr>
+        <p:txBody>
+          <a:bodyPr wrap="square" anchor="ctr">
+            <a:spAutoFit/>
+          </a:bodyPr>
+          <a:lstStyle/>
+          <a:p>
+            <a:pPr algn="ctr"/>
+            <a:r>
+              <a:rPr sz="1300" b="1">
+                <a:solidFill>
+                  <a:srgbClr val="FFFFFF"/>
+                </a:solidFill>
+                <a:latin typeface="Open Sans"/>
+                <a:ea typeface="Open Sans"/>
+                <a:cs typeface="Open Sans"/>
+              </a:rPr>
+              <a:t>3</a:t>
+            </a:r>
+          </a:p>
+        </p:txBody>
+      </p:sp>
+      <p:sp>
+        <p:nvSpPr>
+          <p:cNvPr id="18" name="Rectangle 17"/>
+          <p:cNvSpPr/>
+          <p:nvPr/>
+        </p:nvSpPr>
+        <p:spPr>
+          <a:xfrm>
+            <a:off x="1400000" y="2800000"/>
+            <a:ext cx="10550000" cy="620000"/>
+          </a:xfrm>
+          <a:prstGeom prst="rect">
+            <a:avLst/>
+          </a:prstGeom>
+          <a:solidFill>
+            <a:srgbClr val="FFFFFF"/>
+          </a:solidFill>
+          <a:ln w="12700">
+            <a:solidFill>
+              <a:srgbClr val="999999"/>
+            </a:solidFill>
+          </a:ln>
+        </p:spPr>
+        <p:style>
+          <a:lnRef idx="1">
+            <a:schemeClr val="accent1"/>
+          </a:lnRef>
+          <a:fillRef idx="3">
+            <a:schemeClr val="accent1"/>
+          </a:fillRef>
+          <a:effectRef idx="2">
+            <a:schemeClr val="accent1"/>
+          </a:effectRef>
+          <a:fontRef idx="minor">
+            <a:schemeClr val="lt1"/>
+          </a:fontRef>
+        </p:style>
+        <p:txBody>
+          <a:bodyPr rtlCol="0" anchor="ctr"/>
+          <a:lstStyle/>
+          <a:p>
+            <a:pPr algn="ctr"/>
+          </a:p>
+        </p:txBody>
+      </p:sp>
+      <p:sp>
+        <p:nvSpPr>
+          <p:cNvPr id="19" name="TextBox 18"/>
+          <p:cNvSpPr txBox="1"/>
+          <p:nvPr/>
+        </p:nvSpPr>
+        <p:spPr>
+          <a:xfrm>
+            <a:off x="1600000" y="2800000"/>
+            <a:ext cx="10150000" cy="620000"/>
+          </a:xfrm>
+          <a:prstGeom prst="rect">
+            <a:avLst/>
+          </a:prstGeom>
+          <a:noFill/>
+        </p:spPr>
+        <p:txBody>
+          <a:bodyPr wrap="square" anchor="ctr">
+            <a:spAutoFit/>
+          </a:bodyPr>
+          <a:lstStyle/>
+          <a:p>
+            <a:pPr algn="l"/>
+            <a:r>
+              <a:rPr sz="1300" b="0">
+                <a:solidFill>
+                  <a:srgbClr val="333333"/>
+                </a:solidFill>
+                <a:latin typeface="Open Sans"/>
+                <a:ea typeface="Open Sans"/>
+                <a:cs typeface="Open Sans"/>
+              </a:rPr>
+              <a:t>Сухой порошок осторожно удалите до промывания.</a:t>
+            </a:r>
+          </a:p>
+        </p:txBody>
+      </p:sp>
+      <p:sp>
+        <p:nvSpPr>
+          <p:cNvPr id="20" name="Oval 19"/>
+          <p:cNvSpPr/>
+          <p:nvPr/>
+        </p:nvSpPr>
+        <p:spPr>
+          <a:xfrm>
+            <a:off x="700000" y="3500000"/>
+            <a:ext cx="500000" cy="500000"/>
+          </a:xfrm>
+          <a:prstGeom prst="ellipse">
+            <a:avLst/>
+          </a:prstGeom>
+          <a:solidFill>
+            <a:srgbClr val="555555"/>
+          </a:solidFill>
+          <a:ln>
+            <a:noFill/>
+          </a:ln>
+        </p:spPr>
+        <p:style>
+          <a:lnRef idx="1">
+            <a:schemeClr val="accent1"/>
+          </a:lnRef>
+          <a:fillRef idx="3">
+            <a:schemeClr val="accent1"/>
+          </a:fillRef>
+          <a:effectRef idx="2">
+            <a:schemeClr val="accent1"/>
+          </a:effectRef>
+          <a:fontRef idx="minor">
+            <a:schemeClr val="lt1"/>
+          </a:fontRef>
+        </p:style>
+        <p:txBody>
+          <a:bodyPr rtlCol="0" anchor="ctr"/>
+          <a:lstStyle/>
+          <a:p>
+            <a:pPr algn="ctr"/>
+          </a:p>
+        </p:txBody>
+      </p:sp>
+      <p:sp>
+        <p:nvSpPr>
+          <p:cNvPr id="21" name="TextBox 20"/>
+          <p:cNvSpPr txBox="1"/>
+          <p:nvPr/>
+        </p:nvSpPr>
+        <p:spPr>
+          <a:xfrm>
+            <a:off x="700000" y="3500000"/>
+            <a:ext cx="500000" cy="500000"/>
+          </a:xfrm>
+          <a:prstGeom prst="rect">
+            <a:avLst/>
+          </a:prstGeom>
+          <a:noFill/>
+        </p:spPr>
+        <p:txBody>
+          <a:bodyPr wrap="square" anchor="ctr">
+            <a:spAutoFit/>
+          </a:bodyPr>
+          <a:lstStyle/>
+          <a:p>
+            <a:pPr algn="ctr"/>
+            <a:r>
+              <a:rPr sz="1300" b="1">
+                <a:solidFill>
+                  <a:srgbClr val="FFFFFF"/>
+                </a:solidFill>
+                <a:latin typeface="Open Sans"/>
+                <a:ea typeface="Open Sans"/>
+                <a:cs typeface="Open Sans"/>
+              </a:rPr>
+              <a:t>4</a:t>
+            </a:r>
+          </a:p>
+        </p:txBody>
+      </p:sp>
+      <p:sp>
+        <p:nvSpPr>
+          <p:cNvPr id="22" name="Rectangle 21"/>
+          <p:cNvSpPr/>
+          <p:nvPr/>
+        </p:nvSpPr>
+        <p:spPr>
+          <a:xfrm>
+            <a:off x="1400000" y="3500000"/>
+            <a:ext cx="10550000" cy="620000"/>
+          </a:xfrm>
+          <a:prstGeom prst="rect">
+            <a:avLst/>
+          </a:prstGeom>
+          <a:solidFill>
+            <a:srgbClr val="FFFFFF"/>
+          </a:solidFill>
+          <a:ln w="12700">
+            <a:solidFill>
+              <a:srgbClr val="999999"/>
+            </a:solidFill>
+          </a:ln>
+        </p:spPr>
+        <p:style>
+          <a:lnRef idx="1">
+            <a:schemeClr val="accent1"/>
+          </a:lnRef>
+          <a:fillRef idx="3">
+            <a:schemeClr val="accent1"/>
+          </a:fillRef>
+          <a:effectRef idx="2">
+            <a:schemeClr val="accent1"/>
+          </a:effectRef>
+          <a:fontRef idx="minor">
+            <a:schemeClr val="lt1"/>
+          </a:fontRef>
+        </p:style>
+        <p:txBody>
+          <a:bodyPr rtlCol="0" anchor="ctr"/>
+          <a:lstStyle/>
+          <a:p>
+            <a:pPr algn="ctr"/>
+          </a:p>
+        </p:txBody>
+      </p:sp>
+      <p:sp>
+        <p:nvSpPr>
+          <p:cNvPr id="23" name="TextBox 22"/>
+          <p:cNvSpPr txBox="1"/>
+          <p:nvPr/>
+        </p:nvSpPr>
+        <p:spPr>
+          <a:xfrm>
+            <a:off x="1600000" y="3500000"/>
+            <a:ext cx="10150000" cy="620000"/>
+          </a:xfrm>
+          <a:prstGeom prst="rect">
+            <a:avLst/>
+          </a:prstGeom>
+          <a:noFill/>
+        </p:spPr>
+        <p:txBody>
+          <a:bodyPr wrap="square" anchor="ctr">
+            <a:spAutoFit/>
+          </a:bodyPr>
+          <a:lstStyle/>
+          <a:p>
+            <a:pPr algn="l"/>
+            <a:r>
+              <a:rPr sz="1300" b="0">
+                <a:solidFill>
+                  <a:srgbClr val="333333"/>
+                </a:solidFill>
+                <a:latin typeface="Open Sans"/>
+                <a:ea typeface="Open Sans"/>
+                <a:cs typeface="Open Sans"/>
+              </a:rPr>
+              <a:t>Промывайте кожу большим количеством проточной воды.</a:t>
+            </a:r>
+          </a:p>
+        </p:txBody>
+      </p:sp>
+      <p:sp>
+        <p:nvSpPr>
+          <p:cNvPr id="24" name="Oval 23"/>
+          <p:cNvSpPr/>
+          <p:nvPr/>
+        </p:nvSpPr>
+        <p:spPr>
+          <a:xfrm>
+            <a:off x="700000" y="4200000"/>
+            <a:ext cx="500000" cy="500000"/>
+          </a:xfrm>
+          <a:prstGeom prst="ellipse">
+            <a:avLst/>
+          </a:prstGeom>
+          <a:solidFill>
+            <a:srgbClr val="555555"/>
+          </a:solidFill>
+          <a:ln>
+            <a:noFill/>
+          </a:ln>
+        </p:spPr>
+        <p:style>
+          <a:lnRef idx="1">
+            <a:schemeClr val="accent1"/>
+          </a:lnRef>
+          <a:fillRef idx="3">
+            <a:schemeClr val="accent1"/>
+          </a:fillRef>
+          <a:effectRef idx="2">
+            <a:schemeClr val="accent1"/>
+          </a:effectRef>
+          <a:fontRef idx="minor">
+            <a:schemeClr val="lt1"/>
+          </a:fontRef>
+        </p:style>
+        <p:txBody>
+          <a:bodyPr rtlCol="0" anchor="ctr"/>
+          <a:lstStyle/>
+          <a:p>
+            <a:pPr algn="ctr"/>
+          </a:p>
+        </p:txBody>
+      </p:sp>
+      <p:sp>
+        <p:nvSpPr>
+          <p:cNvPr id="25" name="TextBox 24"/>
+          <p:cNvSpPr txBox="1"/>
+          <p:nvPr/>
+        </p:nvSpPr>
+        <p:spPr>
+          <a:xfrm>
+            <a:off x="700000" y="4200000"/>
+            <a:ext cx="500000" cy="500000"/>
+          </a:xfrm>
+          <a:prstGeom prst="rect">
+            <a:avLst/>
+          </a:prstGeom>
+          <a:noFill/>
+        </p:spPr>
+        <p:txBody>
+          <a:bodyPr wrap="square" anchor="ctr">
+            <a:spAutoFit/>
+          </a:bodyPr>
+          <a:lstStyle/>
+          <a:p>
+            <a:pPr algn="ctr"/>
+            <a:r>
+              <a:rPr sz="1300" b="1">
+                <a:solidFill>
+                  <a:srgbClr val="FFFFFF"/>
+                </a:solidFill>
+                <a:latin typeface="Open Sans"/>
+                <a:ea typeface="Open Sans"/>
+                <a:cs typeface="Open Sans"/>
+              </a:rPr>
+              <a:t>5</a:t>
+            </a:r>
+          </a:p>
+        </p:txBody>
+      </p:sp>
+      <p:sp>
+        <p:nvSpPr>
+          <p:cNvPr id="26" name="Rectangle 25"/>
+          <p:cNvSpPr/>
+          <p:nvPr/>
+        </p:nvSpPr>
+        <p:spPr>
+          <a:xfrm>
+            <a:off x="1400000" y="4200000"/>
+            <a:ext cx="10550000" cy="620000"/>
+          </a:xfrm>
+          <a:prstGeom prst="rect">
+            <a:avLst/>
+          </a:prstGeom>
+          <a:solidFill>
+            <a:srgbClr val="FFFFFF"/>
+          </a:solidFill>
+          <a:ln w="12700">
+            <a:solidFill>
+              <a:srgbClr val="999999"/>
+            </a:solidFill>
+          </a:ln>
+        </p:spPr>
+        <p:style>
+          <a:lnRef idx="1">
+            <a:schemeClr val="accent1"/>
+          </a:lnRef>
+          <a:fillRef idx="3">
+            <a:schemeClr val="accent1"/>
+          </a:fillRef>
+          <a:effectRef idx="2">
+            <a:schemeClr val="accent1"/>
+          </a:effectRef>
+          <a:fontRef idx="minor">
+            <a:schemeClr val="lt1"/>
+          </a:fontRef>
+        </p:style>
+        <p:txBody>
+          <a:bodyPr rtlCol="0" anchor="ctr"/>
+          <a:lstStyle/>
+          <a:p>
+            <a:pPr algn="ctr"/>
+          </a:p>
+        </p:txBody>
+      </p:sp>
+      <p:sp>
+        <p:nvSpPr>
+          <p:cNvPr id="27" name="TextBox 26"/>
+          <p:cNvSpPr txBox="1"/>
+          <p:nvPr/>
+        </p:nvSpPr>
+        <p:spPr>
+          <a:xfrm>
+            <a:off x="1600000" y="4200000"/>
+            <a:ext cx="10150000" cy="620000"/>
+          </a:xfrm>
+          <a:prstGeom prst="rect">
+            <a:avLst/>
+          </a:prstGeom>
+          <a:noFill/>
+        </p:spPr>
+        <p:txBody>
+          <a:bodyPr wrap="square" anchor="ctr">
+            <a:spAutoFit/>
+          </a:bodyPr>
+          <a:lstStyle/>
+          <a:p>
+            <a:pPr algn="l"/>
+            <a:r>
+              <a:rPr sz="1300" b="0">
+                <a:solidFill>
+                  <a:srgbClr val="333333"/>
+                </a:solidFill>
+                <a:latin typeface="Open Sans"/>
+                <a:ea typeface="Open Sans"/>
+                <a:cs typeface="Open Sans"/>
+              </a:rPr>
+              <a:t>Глаз промывайте от внутреннего угла к наружному, удерживая веки открытыми.</a:t>
+            </a:r>
+          </a:p>
+        </p:txBody>
+      </p:sp>
+      <p:sp>
+        <p:nvSpPr>
+          <p:cNvPr id="28" name="Oval 27"/>
+          <p:cNvSpPr/>
+          <p:nvPr/>
+        </p:nvSpPr>
+        <p:spPr>
+          <a:xfrm>
+            <a:off x="700000" y="4900000"/>
+            <a:ext cx="500000" cy="500000"/>
+          </a:xfrm>
+          <a:prstGeom prst="ellipse">
+            <a:avLst/>
+          </a:prstGeom>
+          <a:solidFill>
+            <a:srgbClr val="555555"/>
+          </a:solidFill>
+          <a:ln>
+            <a:noFill/>
+          </a:ln>
+        </p:spPr>
+        <p:style>
+          <a:lnRef idx="1">
+            <a:schemeClr val="accent1"/>
+          </a:lnRef>
+          <a:fillRef idx="3">
+            <a:schemeClr val="accent1"/>
+          </a:fillRef>
+          <a:effectRef idx="2">
+            <a:schemeClr val="accent1"/>
+          </a:effectRef>
+          <a:fontRef idx="minor">
+            <a:schemeClr val="lt1"/>
+          </a:fontRef>
+        </p:style>
+        <p:txBody>
+          <a:bodyPr rtlCol="0" anchor="ctr"/>
+          <a:lstStyle/>
+          <a:p>
+            <a:pPr algn="ctr"/>
+          </a:p>
+        </p:txBody>
+      </p:sp>
+      <p:sp>
+        <p:nvSpPr>
+          <p:cNvPr id="29" name="TextBox 28"/>
+          <p:cNvSpPr txBox="1"/>
+          <p:nvPr/>
+        </p:nvSpPr>
+        <p:spPr>
+          <a:xfrm>
+            <a:off x="700000" y="4900000"/>
+            <a:ext cx="500000" cy="500000"/>
+          </a:xfrm>
+          <a:prstGeom prst="rect">
+            <a:avLst/>
+          </a:prstGeom>
+          <a:noFill/>
+        </p:spPr>
+        <p:txBody>
+          <a:bodyPr wrap="square" anchor="ctr">
+            <a:spAutoFit/>
+          </a:bodyPr>
+          <a:lstStyle/>
+          <a:p>
+            <a:pPr algn="ctr"/>
+            <a:r>
+              <a:rPr sz="1300" b="1">
+                <a:solidFill>
+                  <a:srgbClr val="FFFFFF"/>
+                </a:solidFill>
+                <a:latin typeface="Open Sans"/>
+                <a:ea typeface="Open Sans"/>
+                <a:cs typeface="Open Sans"/>
+              </a:rPr>
+              <a:t>6</a:t>
+            </a:r>
+          </a:p>
+        </p:txBody>
+      </p:sp>
+      <p:sp>
+        <p:nvSpPr>
+          <p:cNvPr id="30" name="Rectangle 29"/>
+          <p:cNvSpPr/>
+          <p:nvPr/>
+        </p:nvSpPr>
+        <p:spPr>
+          <a:xfrm>
+            <a:off x="1400000" y="4900000"/>
+            <a:ext cx="10550000" cy="620000"/>
+          </a:xfrm>
+          <a:prstGeom prst="rect">
+            <a:avLst/>
+          </a:prstGeom>
+          <a:solidFill>
+            <a:srgbClr val="FFFFFF"/>
+          </a:solidFill>
+          <a:ln w="12700">
+            <a:solidFill>
+              <a:srgbClr val="999999"/>
+            </a:solidFill>
+          </a:ln>
+        </p:spPr>
+        <p:style>
+          <a:lnRef idx="1">
+            <a:schemeClr val="accent1"/>
+          </a:lnRef>
+          <a:fillRef idx="3">
+            <a:schemeClr val="accent1"/>
+          </a:fillRef>
+          <a:effectRef idx="2">
+            <a:schemeClr val="accent1"/>
+          </a:effectRef>
+          <a:fontRef idx="minor">
+            <a:schemeClr val="lt1"/>
+          </a:fontRef>
+        </p:style>
+        <p:txBody>
+          <a:bodyPr rtlCol="0" anchor="ctr"/>
+          <a:lstStyle/>
+          <a:p>
+            <a:pPr algn="ctr"/>
+          </a:p>
+        </p:txBody>
+      </p:sp>
+      <p:sp>
+        <p:nvSpPr>
+          <p:cNvPr id="31" name="TextBox 30"/>
+          <p:cNvSpPr txBox="1"/>
+          <p:nvPr/>
+        </p:nvSpPr>
+        <p:spPr>
+          <a:xfrm>
+            <a:off x="1600000" y="4900000"/>
+            <a:ext cx="10150000" cy="620000"/>
+          </a:xfrm>
+          <a:prstGeom prst="rect">
+            <a:avLst/>
+          </a:prstGeom>
+          <a:noFill/>
+        </p:spPr>
+        <p:txBody>
+          <a:bodyPr wrap="square" anchor="ctr">
+            <a:spAutoFit/>
+          </a:bodyPr>
+          <a:lstStyle/>
+          <a:p>
+            <a:pPr algn="l"/>
+            <a:r>
+              <a:rPr sz="1300" b="0">
+                <a:solidFill>
+                  <a:srgbClr val="333333"/>
+                </a:solidFill>
+                <a:latin typeface="Open Sans"/>
+                <a:ea typeface="Open Sans"/>
+                <a:cs typeface="Open Sans"/>
+              </a:rPr>
+              <a:t>После удаления вещества закройте поврежденную кожу свободной повязкой.</a:t>
+            </a:r>
+          </a:p>
+        </p:txBody>
+      </p:sp>
+      <p:sp>
+        <p:nvSpPr>
+          <p:cNvPr id="32" name="Rounded Rectangle 31"/>
+          <p:cNvSpPr/>
+          <p:nvPr/>
+        </p:nvSpPr>
+        <p:spPr>
+          <a:xfrm>
+            <a:off x="700000" y="5800000"/>
+            <a:ext cx="11000000" cy="900000"/>
+          </a:xfrm>
+          <a:prstGeom prst="roundRect">
+            <a:avLst/>
+          </a:prstGeom>
+          <a:solidFill>
+            <a:srgbClr val="F5F0E1"/>
+          </a:solidFill>
+          <a:ln>
+            <a:noFill/>
+          </a:ln>
+        </p:spPr>
+        <p:style>
+          <a:lnRef idx="1">
+            <a:schemeClr val="accent1"/>
+          </a:lnRef>
+          <a:fillRef idx="3">
+            <a:schemeClr val="accent1"/>
+          </a:fillRef>
+          <a:effectRef idx="2">
+            <a:schemeClr val="accent1"/>
+          </a:effectRef>
+          <a:fontRef idx="minor">
+            <a:schemeClr val="lt1"/>
+          </a:fontRef>
+        </p:style>
+        <p:txBody>
+          <a:bodyPr rtlCol="0" anchor="ctr"/>
+          <a:lstStyle/>
+          <a:p>
+            <a:pPr algn="ctr"/>
+          </a:p>
+        </p:txBody>
+      </p:sp>
+      <p:sp>
+        <p:nvSpPr>
+          <p:cNvPr id="33" name="TextBox 32"/>
+          <p:cNvSpPr txBox="1"/>
+          <p:nvPr/>
+        </p:nvSpPr>
+        <p:spPr>
+          <a:xfrm>
+            <a:off x="950000" y="6000000"/>
+            <a:ext cx="10500000" cy="500000"/>
+          </a:xfrm>
+          <a:prstGeom prst="rect">
+            <a:avLst/>
+          </a:prstGeom>
+          <a:noFill/>
+        </p:spPr>
+        <p:txBody>
+          <a:bodyPr wrap="square" anchor="ctr">
+            <a:spAutoFit/>
+          </a:bodyPr>
+          <a:lstStyle/>
+          <a:p>
+            <a:pPr algn="l"/>
+            <a:r>
+              <a:rPr sz="1200" b="0">
+                <a:solidFill>
+                  <a:srgbClr val="333333"/>
+                </a:solidFill>
+                <a:latin typeface="Open Sans"/>
+                <a:ea typeface="Open Sans"/>
+                <a:cs typeface="Open Sans"/>
+              </a:rPr>
+              <a:t>Не растирайте кожу и не смешивайте химикаты в попытке нейтрализации.</a:t>
+            </a:r>
+          </a:p>
+        </p:txBody>
+      </p:sp>
     </p:spTree>
   </p:cSld>
   <p:clrMapOvr>
@@ -3653,6 +4685,1949 @@
         <p:spPr>
           <a:xfrm>
             <a:off x="0" y="0"/>
+            <a:ext cx="12191695" cy="6858000"/>
+          </a:xfrm>
+          <a:prstGeom prst="rect">
+            <a:avLst/>
+          </a:prstGeom>
+          <a:solidFill>
+            <a:srgbClr val="FFFFFF"/>
+          </a:solidFill>
+          <a:ln>
+            <a:noFill/>
+          </a:ln>
+        </p:spPr>
+        <p:style>
+          <a:lnRef idx="1">
+            <a:schemeClr val="accent1"/>
+          </a:lnRef>
+          <a:fillRef idx="3">
+            <a:schemeClr val="accent1"/>
+          </a:fillRef>
+          <a:effectRef idx="2">
+            <a:schemeClr val="accent1"/>
+          </a:effectRef>
+          <a:fontRef idx="minor">
+            <a:schemeClr val="lt1"/>
+          </a:fontRef>
+        </p:style>
+        <p:txBody>
+          <a:bodyPr rtlCol="0" anchor="ctr"/>
+          <a:lstStyle/>
+          <a:p>
+            <a:pPr algn="ctr"/>
+          </a:p>
+        </p:txBody>
+      </p:sp>
+      <p:sp>
+        <p:nvSpPr>
+          <p:cNvPr id="3" name="TextBox 2"/>
+          <p:cNvSpPr txBox="1"/>
+          <p:nvPr/>
+        </p:nvSpPr>
+        <p:spPr>
+          <a:xfrm>
+            <a:off x="700000" y="250000"/>
+            <a:ext cx="11200000" cy="550000"/>
+          </a:xfrm>
+          <a:prstGeom prst="rect">
+            <a:avLst/>
+          </a:prstGeom>
+          <a:noFill/>
+        </p:spPr>
+        <p:txBody>
+          <a:bodyPr wrap="square" anchor="t">
+            <a:spAutoFit/>
+          </a:bodyPr>
+          <a:lstStyle/>
+          <a:p>
+            <a:pPr algn="l"/>
+            <a:r>
+              <a:rPr sz="2200" b="1">
+                <a:solidFill>
+                  <a:srgbClr val="333333"/>
+                </a:solidFill>
+                <a:latin typeface="Open Sans"/>
+                <a:ea typeface="Open Sans"/>
+                <a:cs typeface="Open Sans"/>
+              </a:rPr>
+              <a:t>УКУС, УЖАЛИВАНИЕ ИЛИ ИНЪЕКЦИЯ</a:t>
+            </a:r>
+          </a:p>
+        </p:txBody>
+      </p:sp>
+      <p:sp>
+        <p:nvSpPr>
+          <p:cNvPr id="4" name="Rectangle 3"/>
+          <p:cNvSpPr/>
+          <p:nvPr/>
+        </p:nvSpPr>
+        <p:spPr>
+          <a:xfrm>
+            <a:off x="700000" y="850000"/>
+            <a:ext cx="9000000" cy="28000"/>
+          </a:xfrm>
+          <a:prstGeom prst="rect">
+            <a:avLst/>
+          </a:prstGeom>
+          <a:solidFill>
+            <a:srgbClr val="555555"/>
+          </a:solidFill>
+          <a:ln>
+            <a:noFill/>
+          </a:ln>
+        </p:spPr>
+        <p:style>
+          <a:lnRef idx="1">
+            <a:schemeClr val="accent1"/>
+          </a:lnRef>
+          <a:fillRef idx="3">
+            <a:schemeClr val="accent1"/>
+          </a:fillRef>
+          <a:effectRef idx="2">
+            <a:schemeClr val="accent1"/>
+          </a:effectRef>
+          <a:fontRef idx="minor">
+            <a:schemeClr val="lt1"/>
+          </a:fontRef>
+        </p:style>
+        <p:txBody>
+          <a:bodyPr rtlCol="0" anchor="ctr"/>
+          <a:lstStyle/>
+          <a:p>
+            <a:pPr algn="ctr"/>
+          </a:p>
+        </p:txBody>
+      </p:sp>
+      <p:sp>
+        <p:nvSpPr>
+          <p:cNvPr id="5" name="TextBox 4"/>
+          <p:cNvSpPr txBox="1"/>
+          <p:nvPr/>
+        </p:nvSpPr>
+        <p:spPr>
+          <a:xfrm>
+            <a:off x="700000" y="920000"/>
+            <a:ext cx="11000000" cy="350000"/>
+          </a:xfrm>
+          <a:prstGeom prst="rect">
+            <a:avLst/>
+          </a:prstGeom>
+          <a:noFill/>
+        </p:spPr>
+        <p:txBody>
+          <a:bodyPr wrap="square" anchor="t">
+            <a:spAutoFit/>
+          </a:bodyPr>
+          <a:lstStyle/>
+          <a:p>
+            <a:pPr algn="l"/>
+            <a:r>
+              <a:rPr sz="1200" b="0">
+                <a:solidFill>
+                  <a:srgbClr val="666666"/>
+                </a:solidFill>
+                <a:latin typeface="Open Sans"/>
+                <a:ea typeface="Open Sans"/>
+                <a:cs typeface="Open Sans"/>
+              </a:rPr>
+              <a:t>Оказание первой помощи при травмах, ранениях и поражениях, прочих состояниях</a:t>
+            </a:r>
+          </a:p>
+        </p:txBody>
+      </p:sp>
+      <p:sp>
+        <p:nvSpPr>
+          <p:cNvPr id="6" name="Rectangle 5"/>
+          <p:cNvSpPr/>
+          <p:nvPr/>
+        </p:nvSpPr>
+        <p:spPr>
+          <a:xfrm>
+            <a:off x="0" y="2800000"/>
+            <a:ext cx="420000" cy="420000"/>
+          </a:xfrm>
+          <a:prstGeom prst="rect">
+            <a:avLst/>
+          </a:prstGeom>
+          <a:solidFill>
+            <a:srgbClr val="555555"/>
+          </a:solidFill>
+          <a:ln>
+            <a:noFill/>
+          </a:ln>
+        </p:spPr>
+        <p:style>
+          <a:lnRef idx="1">
+            <a:schemeClr val="accent1"/>
+          </a:lnRef>
+          <a:fillRef idx="3">
+            <a:schemeClr val="accent1"/>
+          </a:fillRef>
+          <a:effectRef idx="2">
+            <a:schemeClr val="accent1"/>
+          </a:effectRef>
+          <a:fontRef idx="minor">
+            <a:schemeClr val="lt1"/>
+          </a:fontRef>
+        </p:style>
+        <p:txBody>
+          <a:bodyPr rtlCol="0" anchor="ctr"/>
+          <a:lstStyle/>
+          <a:p>
+            <a:pPr algn="ctr"/>
+          </a:p>
+        </p:txBody>
+      </p:sp>
+      <p:sp>
+        <p:nvSpPr>
+          <p:cNvPr id="7" name="TextBox 6"/>
+          <p:cNvSpPr txBox="1"/>
+          <p:nvPr/>
+        </p:nvSpPr>
+        <p:spPr>
+          <a:xfrm>
+            <a:off x="0" y="2800000"/>
+            <a:ext cx="420000" cy="420000"/>
+          </a:xfrm>
+          <a:prstGeom prst="rect">
+            <a:avLst/>
+          </a:prstGeom>
+          <a:noFill/>
+        </p:spPr>
+        <p:txBody>
+          <a:bodyPr wrap="square" anchor="ctr">
+            <a:spAutoFit/>
+          </a:bodyPr>
+          <a:lstStyle/>
+          <a:p>
+            <a:pPr algn="ctr"/>
+            <a:r>
+              <a:rPr sz="1400" b="1">
+                <a:solidFill>
+                  <a:srgbClr val="FFFFFF"/>
+                </a:solidFill>
+                <a:latin typeface="Open Sans"/>
+                <a:ea typeface="Open Sans"/>
+                <a:cs typeface="Open Sans"/>
+              </a:rPr>
+              <a:t>11</a:t>
+            </a:r>
+          </a:p>
+        </p:txBody>
+      </p:sp>
+      <p:sp>
+        <p:nvSpPr>
+          <p:cNvPr id="8" name="TextBox 7"/>
+          <p:cNvSpPr txBox="1"/>
+          <p:nvPr/>
+        </p:nvSpPr>
+        <p:spPr>
+          <a:xfrm>
+            <a:off x="700000" y="1450000"/>
+            <a:ext cx="11000000" cy="4000000"/>
+          </a:xfrm>
+          <a:prstGeom prst="rect">
+            <a:avLst/>
+          </a:prstGeom>
+          <a:noFill/>
+        </p:spPr>
+        <p:txBody>
+          <a:bodyPr wrap="square">
+            <a:spAutoFit/>
+          </a:bodyPr>
+          <a:lstStyle/>
+          <a:p>
+            <a:pPr algn="l">
+              <a:spcAft>
+                <a:spcPts val="800"/>
+              </a:spcAft>
+            </a:pPr>
+            <a:r>
+              <a:rPr sz="1400" b="0">
+                <a:solidFill>
+                  <a:srgbClr val="333333"/>
+                </a:solidFill>
+                <a:latin typeface="Open Sans"/>
+                <a:ea typeface="Open Sans"/>
+                <a:cs typeface="Open Sans"/>
+              </a:rPr>
+              <a:t>•  Обеспечьте безопасность и не касайтесь использованной иглы.</a:t>
+            </a:r>
+          </a:p>
+          <a:p>
+            <a:pPr algn="l">
+              <a:spcAft>
+                <a:spcPts val="800"/>
+              </a:spcAft>
+            </a:pPr>
+            <a:r>
+              <a:rPr sz="1400" b="0">
+                <a:solidFill>
+                  <a:srgbClr val="333333"/>
+                </a:solidFill>
+                <a:latin typeface="Open Sans"/>
+                <a:ea typeface="Open Sans"/>
+                <a:cs typeface="Open Sans"/>
+              </a:rPr>
+              <a:t>•  Оцените место введения, общее состояние, сознание и дыхание.</a:t>
+            </a:r>
+          </a:p>
+          <a:p>
+            <a:pPr algn="l">
+              <a:spcAft>
+                <a:spcPts val="800"/>
+              </a:spcAft>
+            </a:pPr>
+            <a:r>
+              <a:rPr sz="1400" b="0">
+                <a:solidFill>
+                  <a:srgbClr val="333333"/>
+                </a:solidFill>
+                <a:latin typeface="Open Sans"/>
+                <a:ea typeface="Open Sans"/>
+                <a:cs typeface="Open Sans"/>
+              </a:rPr>
+              <a:t>•  Обеспечьте покой и ограничьте движение поврежденной части.</a:t>
+            </a:r>
+          </a:p>
+          <a:p>
+            <a:pPr algn="l">
+              <a:spcAft>
+                <a:spcPts val="800"/>
+              </a:spcAft>
+            </a:pPr>
+            <a:r>
+              <a:rPr sz="1400" b="0">
+                <a:solidFill>
+                  <a:srgbClr val="333333"/>
+                </a:solidFill>
+                <a:latin typeface="Open Sans"/>
+                <a:ea typeface="Open Sans"/>
+                <a:cs typeface="Open Sans"/>
+              </a:rPr>
+              <a:t>•  При укусе или ужаливании приложите холод через ткань.</a:t>
+            </a:r>
+          </a:p>
+          <a:p>
+            <a:pPr algn="l">
+              <a:spcAft>
+                <a:spcPts val="800"/>
+              </a:spcAft>
+            </a:pPr>
+            <a:r>
+              <a:rPr sz="1400" b="0">
+                <a:solidFill>
+                  <a:srgbClr val="333333"/>
+                </a:solidFill>
+                <a:latin typeface="Open Sans"/>
+                <a:ea typeface="Open Sans"/>
+                <a:cs typeface="Open Sans"/>
+              </a:rPr>
+              <a:t>•  Не разрезайте, не прижигайте рану и не высасывайте содержимое.</a:t>
+            </a:r>
+          </a:p>
+          <a:p>
+            <a:pPr algn="l">
+              <a:spcAft>
+                <a:spcPts val="800"/>
+              </a:spcAft>
+            </a:pPr>
+            <a:r>
+              <a:rPr sz="1400" b="0">
+                <a:solidFill>
+                  <a:srgbClr val="333333"/>
+                </a:solidFill>
+                <a:latin typeface="Open Sans"/>
+                <a:ea typeface="Open Sans"/>
+                <a:cs typeface="Open Sans"/>
+              </a:rPr>
+              <a:t>•  Сообщите специалистам время, обстоятельства и известное вещество.</a:t>
+            </a:r>
+          </a:p>
+        </p:txBody>
+      </p:sp>
+    </p:spTree>
+  </p:cSld>
+  <p:clrMapOvr>
+    <a:masterClrMapping/>
+  </p:clrMapOvr>
+</p:sld>
+</file>
+
+<file path=ppt/slides/slide12.xml><?xml version="1.0" encoding="utf-8"?>
+<p:sld xmlns:a="http://schemas.openxmlformats.org/drawingml/2006/main" xmlns:p="http://schemas.openxmlformats.org/presentationml/2006/main" xmlns:r="http://schemas.openxmlformats.org/officeDocument/2006/relationships">
+  <p:cSld>
+    <p:spTree>
+      <p:nvGrpSpPr>
+        <p:cNvPr id="1" name=""/>
+        <p:cNvGrpSpPr/>
+        <p:nvPr/>
+      </p:nvGrpSpPr>
+      <p:grpSpPr/>
+      <p:sp>
+        <p:nvSpPr>
+          <p:cNvPr id="2" name="Rectangle 1"/>
+          <p:cNvSpPr/>
+          <p:nvPr/>
+        </p:nvSpPr>
+        <p:spPr>
+          <a:xfrm>
+            <a:off x="0" y="0"/>
+            <a:ext cx="12191695" cy="6858000"/>
+          </a:xfrm>
+          <a:prstGeom prst="rect">
+            <a:avLst/>
+          </a:prstGeom>
+          <a:solidFill>
+            <a:srgbClr val="FFFFFF"/>
+          </a:solidFill>
+          <a:ln>
+            <a:noFill/>
+          </a:ln>
+        </p:spPr>
+        <p:style>
+          <a:lnRef idx="1">
+            <a:schemeClr val="accent1"/>
+          </a:lnRef>
+          <a:fillRef idx="3">
+            <a:schemeClr val="accent1"/>
+          </a:fillRef>
+          <a:effectRef idx="2">
+            <a:schemeClr val="accent1"/>
+          </a:effectRef>
+          <a:fontRef idx="minor">
+            <a:schemeClr val="lt1"/>
+          </a:fontRef>
+        </p:style>
+        <p:txBody>
+          <a:bodyPr rtlCol="0" anchor="ctr"/>
+          <a:lstStyle/>
+          <a:p>
+            <a:pPr algn="ctr"/>
+          </a:p>
+        </p:txBody>
+      </p:sp>
+      <p:sp>
+        <p:nvSpPr>
+          <p:cNvPr id="3" name="TextBox 2"/>
+          <p:cNvSpPr txBox="1"/>
+          <p:nvPr/>
+        </p:nvSpPr>
+        <p:spPr>
+          <a:xfrm>
+            <a:off x="700000" y="250000"/>
+            <a:ext cx="11200000" cy="550000"/>
+          </a:xfrm>
+          <a:prstGeom prst="rect">
+            <a:avLst/>
+          </a:prstGeom>
+          <a:noFill/>
+        </p:spPr>
+        <p:txBody>
+          <a:bodyPr wrap="square" anchor="t">
+            <a:spAutoFit/>
+          </a:bodyPr>
+          <a:lstStyle/>
+          <a:p>
+            <a:pPr algn="l"/>
+            <a:r>
+              <a:rPr sz="2200" b="1">
+                <a:solidFill>
+                  <a:srgbClr val="333333"/>
+                </a:solidFill>
+                <a:latin typeface="Open Sans"/>
+                <a:ea typeface="Open Sans"/>
+                <a:cs typeface="Open Sans"/>
+              </a:rPr>
+              <a:t>НАБЛЮДЕНИЕ ДО ПЕРЕДАЧИ</a:t>
+            </a:r>
+          </a:p>
+        </p:txBody>
+      </p:sp>
+      <p:sp>
+        <p:nvSpPr>
+          <p:cNvPr id="4" name="Rectangle 3"/>
+          <p:cNvSpPr/>
+          <p:nvPr/>
+        </p:nvSpPr>
+        <p:spPr>
+          <a:xfrm>
+            <a:off x="700000" y="850000"/>
+            <a:ext cx="9000000" cy="28000"/>
+          </a:xfrm>
+          <a:prstGeom prst="rect">
+            <a:avLst/>
+          </a:prstGeom>
+          <a:solidFill>
+            <a:srgbClr val="555555"/>
+          </a:solidFill>
+          <a:ln>
+            <a:noFill/>
+          </a:ln>
+        </p:spPr>
+        <p:style>
+          <a:lnRef idx="1">
+            <a:schemeClr val="accent1"/>
+          </a:lnRef>
+          <a:fillRef idx="3">
+            <a:schemeClr val="accent1"/>
+          </a:fillRef>
+          <a:effectRef idx="2">
+            <a:schemeClr val="accent1"/>
+          </a:effectRef>
+          <a:fontRef idx="minor">
+            <a:schemeClr val="lt1"/>
+          </a:fontRef>
+        </p:style>
+        <p:txBody>
+          <a:bodyPr rtlCol="0" anchor="ctr"/>
+          <a:lstStyle/>
+          <a:p>
+            <a:pPr algn="ctr"/>
+          </a:p>
+        </p:txBody>
+      </p:sp>
+      <p:sp>
+        <p:nvSpPr>
+          <p:cNvPr id="5" name="TextBox 4"/>
+          <p:cNvSpPr txBox="1"/>
+          <p:nvPr/>
+        </p:nvSpPr>
+        <p:spPr>
+          <a:xfrm>
+            <a:off x="700000" y="920000"/>
+            <a:ext cx="11000000" cy="350000"/>
+          </a:xfrm>
+          <a:prstGeom prst="rect">
+            <a:avLst/>
+          </a:prstGeom>
+          <a:noFill/>
+        </p:spPr>
+        <p:txBody>
+          <a:bodyPr wrap="square" anchor="t">
+            <a:spAutoFit/>
+          </a:bodyPr>
+          <a:lstStyle/>
+          <a:p>
+            <a:pPr algn="l"/>
+            <a:r>
+              <a:rPr sz="1200" b="0">
+                <a:solidFill>
+                  <a:srgbClr val="666666"/>
+                </a:solidFill>
+                <a:latin typeface="Open Sans"/>
+                <a:ea typeface="Open Sans"/>
+                <a:cs typeface="Open Sans"/>
+              </a:rPr>
+              <a:t>Оказание первой помощи при травмах, ранениях и поражениях, прочих состояниях</a:t>
+            </a:r>
+          </a:p>
+        </p:txBody>
+      </p:sp>
+      <p:sp>
+        <p:nvSpPr>
+          <p:cNvPr id="6" name="Rectangle 5"/>
+          <p:cNvSpPr/>
+          <p:nvPr/>
+        </p:nvSpPr>
+        <p:spPr>
+          <a:xfrm>
+            <a:off x="0" y="2800000"/>
+            <a:ext cx="420000" cy="420000"/>
+          </a:xfrm>
+          <a:prstGeom prst="rect">
+            <a:avLst/>
+          </a:prstGeom>
+          <a:solidFill>
+            <a:srgbClr val="555555"/>
+          </a:solidFill>
+          <a:ln>
+            <a:noFill/>
+          </a:ln>
+        </p:spPr>
+        <p:style>
+          <a:lnRef idx="1">
+            <a:schemeClr val="accent1"/>
+          </a:lnRef>
+          <a:fillRef idx="3">
+            <a:schemeClr val="accent1"/>
+          </a:fillRef>
+          <a:effectRef idx="2">
+            <a:schemeClr val="accent1"/>
+          </a:effectRef>
+          <a:fontRef idx="minor">
+            <a:schemeClr val="lt1"/>
+          </a:fontRef>
+        </p:style>
+        <p:txBody>
+          <a:bodyPr rtlCol="0" anchor="ctr"/>
+          <a:lstStyle/>
+          <a:p>
+            <a:pPr algn="ctr"/>
+          </a:p>
+        </p:txBody>
+      </p:sp>
+      <p:sp>
+        <p:nvSpPr>
+          <p:cNvPr id="7" name="TextBox 6"/>
+          <p:cNvSpPr txBox="1"/>
+          <p:nvPr/>
+        </p:nvSpPr>
+        <p:spPr>
+          <a:xfrm>
+            <a:off x="0" y="2800000"/>
+            <a:ext cx="420000" cy="420000"/>
+          </a:xfrm>
+          <a:prstGeom prst="rect">
+            <a:avLst/>
+          </a:prstGeom>
+          <a:noFill/>
+        </p:spPr>
+        <p:txBody>
+          <a:bodyPr wrap="square" anchor="ctr">
+            <a:spAutoFit/>
+          </a:bodyPr>
+          <a:lstStyle/>
+          <a:p>
+            <a:pPr algn="ctr"/>
+            <a:r>
+              <a:rPr sz="1400" b="1">
+                <a:solidFill>
+                  <a:srgbClr val="FFFFFF"/>
+                </a:solidFill>
+                <a:latin typeface="Open Sans"/>
+                <a:ea typeface="Open Sans"/>
+                <a:cs typeface="Open Sans"/>
+              </a:rPr>
+              <a:t>12</a:t>
+            </a:r>
+          </a:p>
+        </p:txBody>
+      </p:sp>
+      <p:sp>
+        <p:nvSpPr>
+          <p:cNvPr id="8" name="TextBox 7"/>
+          <p:cNvSpPr txBox="1"/>
+          <p:nvPr/>
+        </p:nvSpPr>
+        <p:spPr>
+          <a:xfrm>
+            <a:off x="700000" y="1450000"/>
+            <a:ext cx="11000000" cy="4000000"/>
+          </a:xfrm>
+          <a:prstGeom prst="rect">
+            <a:avLst/>
+          </a:prstGeom>
+          <a:noFill/>
+        </p:spPr>
+        <p:txBody>
+          <a:bodyPr wrap="square">
+            <a:spAutoFit/>
+          </a:bodyPr>
+          <a:lstStyle/>
+          <a:p>
+            <a:pPr algn="l">
+              <a:spcAft>
+                <a:spcPts val="800"/>
+              </a:spcAft>
+            </a:pPr>
+            <a:r>
+              <a:rPr sz="1400" b="0">
+                <a:solidFill>
+                  <a:srgbClr val="333333"/>
+                </a:solidFill>
+                <a:latin typeface="Open Sans"/>
+                <a:ea typeface="Open Sans"/>
+                <a:cs typeface="Open Sans"/>
+              </a:rPr>
+              <a:t>•  Регулярно проверяйте сознание и характер дыхания.</a:t>
+            </a:r>
+          </a:p>
+          <a:p>
+            <a:pPr algn="l">
+              <a:spcAft>
+                <a:spcPts val="800"/>
+              </a:spcAft>
+            </a:pPr>
+            <a:r>
+              <a:rPr sz="1400" b="0">
+                <a:solidFill>
+                  <a:srgbClr val="333333"/>
+                </a:solidFill>
+                <a:latin typeface="Open Sans"/>
+                <a:ea typeface="Open Sans"/>
+                <a:cs typeface="Open Sans"/>
+              </a:rPr>
+              <a:t>•  При нормальном дыхании у человека без сознания поддерживайте боковое положение.</a:t>
+            </a:r>
+          </a:p>
+          <a:p>
+            <a:pPr algn="l">
+              <a:spcAft>
+                <a:spcPts val="800"/>
+              </a:spcAft>
+            </a:pPr>
+            <a:r>
+              <a:rPr sz="1400" b="0">
+                <a:solidFill>
+                  <a:srgbClr val="333333"/>
+                </a:solidFill>
+                <a:latin typeface="Open Sans"/>
+                <a:ea typeface="Open Sans"/>
+                <a:cs typeface="Open Sans"/>
+              </a:rPr>
+              <a:t>•  При отсутствии нормального дыхания немедленно начинайте реанимацию.</a:t>
+            </a:r>
+          </a:p>
+          <a:p>
+            <a:pPr algn="l">
+              <a:spcAft>
+                <a:spcPts val="800"/>
+              </a:spcAft>
+            </a:pPr>
+            <a:r>
+              <a:rPr sz="1400" b="0">
+                <a:solidFill>
+                  <a:srgbClr val="333333"/>
+                </a:solidFill>
+                <a:latin typeface="Open Sans"/>
+                <a:ea typeface="Open Sans"/>
+                <a:cs typeface="Open Sans"/>
+              </a:rPr>
+              <a:t>•  Не оставляйте пострадавшего одного и не разрешайте ему самостоятельно идти.</a:t>
+            </a:r>
+          </a:p>
+          <a:p>
+            <a:pPr algn="l">
+              <a:spcAft>
+                <a:spcPts val="800"/>
+              </a:spcAft>
+            </a:pPr>
+            <a:r>
+              <a:rPr sz="1400" b="0">
+                <a:solidFill>
+                  <a:srgbClr val="333333"/>
+                </a:solidFill>
+                <a:latin typeface="Open Sans"/>
+                <a:ea typeface="Open Sans"/>
+                <a:cs typeface="Open Sans"/>
+              </a:rPr>
+              <a:t>•  Отмечайте время появления и усиления каждого признака.</a:t>
+            </a:r>
+          </a:p>
+          <a:p>
+            <a:pPr algn="l">
+              <a:spcAft>
+                <a:spcPts val="800"/>
+              </a:spcAft>
+            </a:pPr>
+            <a:r>
+              <a:rPr sz="1400" b="0">
+                <a:solidFill>
+                  <a:srgbClr val="333333"/>
+                </a:solidFill>
+                <a:latin typeface="Open Sans"/>
+                <a:ea typeface="Open Sans"/>
+                <a:cs typeface="Open Sans"/>
+              </a:rPr>
+              <a:t>•  Передайте бригаде упаковку вещества и сведения обо всех выполненных действиях.</a:t>
+            </a:r>
+          </a:p>
+        </p:txBody>
+      </p:sp>
+    </p:spTree>
+  </p:cSld>
+  <p:clrMapOvr>
+    <a:masterClrMapping/>
+  </p:clrMapOvr>
+</p:sld>
+</file>
+
+<file path=ppt/slides/slide13.xml><?xml version="1.0" encoding="utf-8"?>
+<p:sld xmlns:a="http://schemas.openxmlformats.org/drawingml/2006/main" xmlns:p="http://schemas.openxmlformats.org/presentationml/2006/main" xmlns:r="http://schemas.openxmlformats.org/officeDocument/2006/relationships">
+  <p:cSld>
+    <p:spTree>
+      <p:nvGrpSpPr>
+        <p:cNvPr id="1" name=""/>
+        <p:cNvGrpSpPr/>
+        <p:nvPr/>
+      </p:nvGrpSpPr>
+      <p:grpSpPr/>
+      <p:sp>
+        <p:nvSpPr>
+          <p:cNvPr id="2" name="Rectangle 1"/>
+          <p:cNvSpPr/>
+          <p:nvPr/>
+        </p:nvSpPr>
+        <p:spPr>
+          <a:xfrm>
+            <a:off x="0" y="0"/>
+            <a:ext cx="12191695" cy="6858000"/>
+          </a:xfrm>
+          <a:prstGeom prst="rect">
+            <a:avLst/>
+          </a:prstGeom>
+          <a:solidFill>
+            <a:srgbClr val="FFFFFF"/>
+          </a:solidFill>
+          <a:ln>
+            <a:noFill/>
+          </a:ln>
+        </p:spPr>
+        <p:style>
+          <a:lnRef idx="1">
+            <a:schemeClr val="accent1"/>
+          </a:lnRef>
+          <a:fillRef idx="3">
+            <a:schemeClr val="accent1"/>
+          </a:fillRef>
+          <a:effectRef idx="2">
+            <a:schemeClr val="accent1"/>
+          </a:effectRef>
+          <a:fontRef idx="minor">
+            <a:schemeClr val="lt1"/>
+          </a:fontRef>
+        </p:style>
+        <p:txBody>
+          <a:bodyPr rtlCol="0" anchor="ctr"/>
+          <a:lstStyle/>
+          <a:p>
+            <a:pPr algn="ctr"/>
+          </a:p>
+        </p:txBody>
+      </p:sp>
+      <p:sp>
+        <p:nvSpPr>
+          <p:cNvPr id="3" name="TextBox 2"/>
+          <p:cNvSpPr txBox="1"/>
+          <p:nvPr/>
+        </p:nvSpPr>
+        <p:spPr>
+          <a:xfrm>
+            <a:off x="700000" y="250000"/>
+            <a:ext cx="11200000" cy="550000"/>
+          </a:xfrm>
+          <a:prstGeom prst="rect">
+            <a:avLst/>
+          </a:prstGeom>
+          <a:noFill/>
+        </p:spPr>
+        <p:txBody>
+          <a:bodyPr wrap="square" anchor="t">
+            <a:spAutoFit/>
+          </a:bodyPr>
+          <a:lstStyle/>
+          <a:p>
+            <a:pPr algn="l"/>
+            <a:r>
+              <a:rPr sz="2200" b="1">
+                <a:solidFill>
+                  <a:srgbClr val="333333"/>
+                </a:solidFill>
+                <a:latin typeface="Open Sans"/>
+                <a:ea typeface="Open Sans"/>
+                <a:cs typeface="Open Sans"/>
+              </a:rPr>
+              <a:t>ГЛАВНОЕ ЗАПОМНИТЬ</a:t>
+            </a:r>
+          </a:p>
+        </p:txBody>
+      </p:sp>
+      <p:sp>
+        <p:nvSpPr>
+          <p:cNvPr id="4" name="Rectangle 3"/>
+          <p:cNvSpPr/>
+          <p:nvPr/>
+        </p:nvSpPr>
+        <p:spPr>
+          <a:xfrm>
+            <a:off x="700000" y="850000"/>
+            <a:ext cx="9000000" cy="28000"/>
+          </a:xfrm>
+          <a:prstGeom prst="rect">
+            <a:avLst/>
+          </a:prstGeom>
+          <a:solidFill>
+            <a:srgbClr val="555555"/>
+          </a:solidFill>
+          <a:ln>
+            <a:noFill/>
+          </a:ln>
+        </p:spPr>
+        <p:style>
+          <a:lnRef idx="1">
+            <a:schemeClr val="accent1"/>
+          </a:lnRef>
+          <a:fillRef idx="3">
+            <a:schemeClr val="accent1"/>
+          </a:fillRef>
+          <a:effectRef idx="2">
+            <a:schemeClr val="accent1"/>
+          </a:effectRef>
+          <a:fontRef idx="minor">
+            <a:schemeClr val="lt1"/>
+          </a:fontRef>
+        </p:style>
+        <p:txBody>
+          <a:bodyPr rtlCol="0" anchor="ctr"/>
+          <a:lstStyle/>
+          <a:p>
+            <a:pPr algn="ctr"/>
+          </a:p>
+        </p:txBody>
+      </p:sp>
+      <p:sp>
+        <p:nvSpPr>
+          <p:cNvPr id="5" name="TextBox 4"/>
+          <p:cNvSpPr txBox="1"/>
+          <p:nvPr/>
+        </p:nvSpPr>
+        <p:spPr>
+          <a:xfrm>
+            <a:off x="700000" y="920000"/>
+            <a:ext cx="11000000" cy="350000"/>
+          </a:xfrm>
+          <a:prstGeom prst="rect">
+            <a:avLst/>
+          </a:prstGeom>
+          <a:noFill/>
+        </p:spPr>
+        <p:txBody>
+          <a:bodyPr wrap="square" anchor="t">
+            <a:spAutoFit/>
+          </a:bodyPr>
+          <a:lstStyle/>
+          <a:p>
+            <a:pPr algn="l"/>
+            <a:r>
+              <a:rPr sz="1200" b="0">
+                <a:solidFill>
+                  <a:srgbClr val="666666"/>
+                </a:solidFill>
+                <a:latin typeface="Open Sans"/>
+                <a:ea typeface="Open Sans"/>
+                <a:cs typeface="Open Sans"/>
+              </a:rPr>
+              <a:t>Оказание первой помощи при травмах, ранениях и поражениях, прочих состояниях</a:t>
+            </a:r>
+          </a:p>
+        </p:txBody>
+      </p:sp>
+      <p:sp>
+        <p:nvSpPr>
+          <p:cNvPr id="6" name="Rectangle 5"/>
+          <p:cNvSpPr/>
+          <p:nvPr/>
+        </p:nvSpPr>
+        <p:spPr>
+          <a:xfrm>
+            <a:off x="0" y="2800000"/>
+            <a:ext cx="420000" cy="420000"/>
+          </a:xfrm>
+          <a:prstGeom prst="rect">
+            <a:avLst/>
+          </a:prstGeom>
+          <a:solidFill>
+            <a:srgbClr val="555555"/>
+          </a:solidFill>
+          <a:ln>
+            <a:noFill/>
+          </a:ln>
+        </p:spPr>
+        <p:style>
+          <a:lnRef idx="1">
+            <a:schemeClr val="accent1"/>
+          </a:lnRef>
+          <a:fillRef idx="3">
+            <a:schemeClr val="accent1"/>
+          </a:fillRef>
+          <a:effectRef idx="2">
+            <a:schemeClr val="accent1"/>
+          </a:effectRef>
+          <a:fontRef idx="minor">
+            <a:schemeClr val="lt1"/>
+          </a:fontRef>
+        </p:style>
+        <p:txBody>
+          <a:bodyPr rtlCol="0" anchor="ctr"/>
+          <a:lstStyle/>
+          <a:p>
+            <a:pPr algn="ctr"/>
+          </a:p>
+        </p:txBody>
+      </p:sp>
+      <p:sp>
+        <p:nvSpPr>
+          <p:cNvPr id="7" name="TextBox 6"/>
+          <p:cNvSpPr txBox="1"/>
+          <p:nvPr/>
+        </p:nvSpPr>
+        <p:spPr>
+          <a:xfrm>
+            <a:off x="0" y="2800000"/>
+            <a:ext cx="420000" cy="420000"/>
+          </a:xfrm>
+          <a:prstGeom prst="rect">
+            <a:avLst/>
+          </a:prstGeom>
+          <a:noFill/>
+        </p:spPr>
+        <p:txBody>
+          <a:bodyPr wrap="square" anchor="ctr">
+            <a:spAutoFit/>
+          </a:bodyPr>
+          <a:lstStyle/>
+          <a:p>
+            <a:pPr algn="ctr"/>
+            <a:r>
+              <a:rPr sz="1400" b="1">
+                <a:solidFill>
+                  <a:srgbClr val="FFFFFF"/>
+                </a:solidFill>
+                <a:latin typeface="Open Sans"/>
+                <a:ea typeface="Open Sans"/>
+                <a:cs typeface="Open Sans"/>
+              </a:rPr>
+              <a:t>13</a:t>
+            </a:r>
+          </a:p>
+        </p:txBody>
+      </p:sp>
+      <p:sp>
+        <p:nvSpPr>
+          <p:cNvPr id="8" name="Rectangle 7"/>
+          <p:cNvSpPr/>
+          <p:nvPr/>
+        </p:nvSpPr>
+        <p:spPr>
+          <a:xfrm>
+            <a:off x="700000" y="1450000"/>
+            <a:ext cx="11000000" cy="850000"/>
+          </a:xfrm>
+          <a:prstGeom prst="rect">
+            <a:avLst/>
+          </a:prstGeom>
+          <a:solidFill>
+            <a:srgbClr val="FFFFFF"/>
+          </a:solidFill>
+          <a:ln w="12700">
+            <a:solidFill>
+              <a:srgbClr val="999999"/>
+            </a:solidFill>
+          </a:ln>
+        </p:spPr>
+        <p:style>
+          <a:lnRef idx="1">
+            <a:schemeClr val="accent1"/>
+          </a:lnRef>
+          <a:fillRef idx="3">
+            <a:schemeClr val="accent1"/>
+          </a:fillRef>
+          <a:effectRef idx="2">
+            <a:schemeClr val="accent1"/>
+          </a:effectRef>
+          <a:fontRef idx="minor">
+            <a:schemeClr val="lt1"/>
+          </a:fontRef>
+        </p:style>
+        <p:txBody>
+          <a:bodyPr rtlCol="0" anchor="ctr"/>
+          <a:lstStyle/>
+          <a:p>
+            <a:pPr algn="ctr"/>
+          </a:p>
+        </p:txBody>
+      </p:sp>
+      <p:sp>
+        <p:nvSpPr>
+          <p:cNvPr id="9" name="Rectangle 8"/>
+          <p:cNvSpPr/>
+          <p:nvPr/>
+        </p:nvSpPr>
+        <p:spPr>
+          <a:xfrm>
+            <a:off x="700000" y="1450000"/>
+            <a:ext cx="90000" cy="850000"/>
+          </a:xfrm>
+          <a:prstGeom prst="rect">
+            <a:avLst/>
+          </a:prstGeom>
+          <a:solidFill>
+            <a:srgbClr val="CC0000"/>
+          </a:solidFill>
+          <a:ln>
+            <a:noFill/>
+          </a:ln>
+        </p:spPr>
+        <p:style>
+          <a:lnRef idx="1">
+            <a:schemeClr val="accent1"/>
+          </a:lnRef>
+          <a:fillRef idx="3">
+            <a:schemeClr val="accent1"/>
+          </a:fillRef>
+          <a:effectRef idx="2">
+            <a:schemeClr val="accent1"/>
+          </a:effectRef>
+          <a:fontRef idx="minor">
+            <a:schemeClr val="lt1"/>
+          </a:fontRef>
+        </p:style>
+        <p:txBody>
+          <a:bodyPr rtlCol="0" anchor="ctr"/>
+          <a:lstStyle/>
+          <a:p>
+            <a:pPr algn="ctr"/>
+          </a:p>
+        </p:txBody>
+      </p:sp>
+      <p:sp>
+        <p:nvSpPr>
+          <p:cNvPr id="10" name="TextBox 9"/>
+          <p:cNvSpPr txBox="1"/>
+          <p:nvPr/>
+        </p:nvSpPr>
+        <p:spPr>
+          <a:xfrm>
+            <a:off x="1000000" y="1530000"/>
+            <a:ext cx="10400000" cy="690000"/>
+          </a:xfrm>
+          <a:prstGeom prst="rect">
+            <a:avLst/>
+          </a:prstGeom>
+          <a:noFill/>
+        </p:spPr>
+        <p:txBody>
+          <a:bodyPr wrap="square" anchor="ctr">
+            <a:spAutoFit/>
+          </a:bodyPr>
+          <a:lstStyle/>
+          <a:p>
+            <a:pPr algn="l"/>
+            <a:r>
+              <a:rPr sz="1300" b="0">
+                <a:solidFill>
+                  <a:srgbClr val="333333"/>
+                </a:solidFill>
+                <a:latin typeface="Open Sans"/>
+                <a:ea typeface="Open Sans"/>
+                <a:cs typeface="Open Sans"/>
+              </a:rPr>
+              <a:t>Прекратите действие яда, не подвергая себя опасности</a:t>
+            </a:r>
+          </a:p>
+        </p:txBody>
+      </p:sp>
+      <p:sp>
+        <p:nvSpPr>
+          <p:cNvPr id="11" name="Rectangle 10"/>
+          <p:cNvSpPr/>
+          <p:nvPr/>
+        </p:nvSpPr>
+        <p:spPr>
+          <a:xfrm>
+            <a:off x="700000" y="2380000"/>
+            <a:ext cx="11000000" cy="850000"/>
+          </a:xfrm>
+          <a:prstGeom prst="rect">
+            <a:avLst/>
+          </a:prstGeom>
+          <a:solidFill>
+            <a:srgbClr val="FFFFFF"/>
+          </a:solidFill>
+          <a:ln w="12700">
+            <a:solidFill>
+              <a:srgbClr val="999999"/>
+            </a:solidFill>
+          </a:ln>
+        </p:spPr>
+        <p:style>
+          <a:lnRef idx="1">
+            <a:schemeClr val="accent1"/>
+          </a:lnRef>
+          <a:fillRef idx="3">
+            <a:schemeClr val="accent1"/>
+          </a:fillRef>
+          <a:effectRef idx="2">
+            <a:schemeClr val="accent1"/>
+          </a:effectRef>
+          <a:fontRef idx="minor">
+            <a:schemeClr val="lt1"/>
+          </a:fontRef>
+        </p:style>
+        <p:txBody>
+          <a:bodyPr rtlCol="0" anchor="ctr"/>
+          <a:lstStyle/>
+          <a:p>
+            <a:pPr algn="ctr"/>
+          </a:p>
+        </p:txBody>
+      </p:sp>
+      <p:sp>
+        <p:nvSpPr>
+          <p:cNvPr id="12" name="Rectangle 11"/>
+          <p:cNvSpPr/>
+          <p:nvPr/>
+        </p:nvSpPr>
+        <p:spPr>
+          <a:xfrm>
+            <a:off x="700000" y="2380000"/>
+            <a:ext cx="90000" cy="850000"/>
+          </a:xfrm>
+          <a:prstGeom prst="rect">
+            <a:avLst/>
+          </a:prstGeom>
+          <a:solidFill>
+            <a:srgbClr val="CC0000"/>
+          </a:solidFill>
+          <a:ln>
+            <a:noFill/>
+          </a:ln>
+        </p:spPr>
+        <p:style>
+          <a:lnRef idx="1">
+            <a:schemeClr val="accent1"/>
+          </a:lnRef>
+          <a:fillRef idx="3">
+            <a:schemeClr val="accent1"/>
+          </a:fillRef>
+          <a:effectRef idx="2">
+            <a:schemeClr val="accent1"/>
+          </a:effectRef>
+          <a:fontRef idx="minor">
+            <a:schemeClr val="lt1"/>
+          </a:fontRef>
+        </p:style>
+        <p:txBody>
+          <a:bodyPr rtlCol="0" anchor="ctr"/>
+          <a:lstStyle/>
+          <a:p>
+            <a:pPr algn="ctr"/>
+          </a:p>
+        </p:txBody>
+      </p:sp>
+      <p:sp>
+        <p:nvSpPr>
+          <p:cNvPr id="13" name="TextBox 12"/>
+          <p:cNvSpPr txBox="1"/>
+          <p:nvPr/>
+        </p:nvSpPr>
+        <p:spPr>
+          <a:xfrm>
+            <a:off x="1000000" y="2460000"/>
+            <a:ext cx="10400000" cy="690000"/>
+          </a:xfrm>
+          <a:prstGeom prst="rect">
+            <a:avLst/>
+          </a:prstGeom>
+          <a:noFill/>
+        </p:spPr>
+        <p:txBody>
+          <a:bodyPr wrap="square" anchor="ctr">
+            <a:spAutoFit/>
+          </a:bodyPr>
+          <a:lstStyle/>
+          <a:p>
+            <a:pPr algn="l"/>
+            <a:r>
+              <a:rPr sz="1300" b="0">
+                <a:solidFill>
+                  <a:srgbClr val="333333"/>
+                </a:solidFill>
+                <a:latin typeface="Open Sans"/>
+                <a:ea typeface="Open Sans"/>
+                <a:cs typeface="Open Sans"/>
+              </a:rPr>
+              <a:t>Узнайте: какое вещество, сколько, каким путем и когда</a:t>
+            </a:r>
+          </a:p>
+        </p:txBody>
+      </p:sp>
+      <p:sp>
+        <p:nvSpPr>
+          <p:cNvPr id="14" name="Rectangle 13"/>
+          <p:cNvSpPr/>
+          <p:nvPr/>
+        </p:nvSpPr>
+        <p:spPr>
+          <a:xfrm>
+            <a:off x="700000" y="3310000"/>
+            <a:ext cx="11000000" cy="850000"/>
+          </a:xfrm>
+          <a:prstGeom prst="rect">
+            <a:avLst/>
+          </a:prstGeom>
+          <a:solidFill>
+            <a:srgbClr val="FFFFFF"/>
+          </a:solidFill>
+          <a:ln w="12700">
+            <a:solidFill>
+              <a:srgbClr val="999999"/>
+            </a:solidFill>
+          </a:ln>
+        </p:spPr>
+        <p:style>
+          <a:lnRef idx="1">
+            <a:schemeClr val="accent1"/>
+          </a:lnRef>
+          <a:fillRef idx="3">
+            <a:schemeClr val="accent1"/>
+          </a:fillRef>
+          <a:effectRef idx="2">
+            <a:schemeClr val="accent1"/>
+          </a:effectRef>
+          <a:fontRef idx="minor">
+            <a:schemeClr val="lt1"/>
+          </a:fontRef>
+        </p:style>
+        <p:txBody>
+          <a:bodyPr rtlCol="0" anchor="ctr"/>
+          <a:lstStyle/>
+          <a:p>
+            <a:pPr algn="ctr"/>
+          </a:p>
+        </p:txBody>
+      </p:sp>
+      <p:sp>
+        <p:nvSpPr>
+          <p:cNvPr id="15" name="Rectangle 14"/>
+          <p:cNvSpPr/>
+          <p:nvPr/>
+        </p:nvSpPr>
+        <p:spPr>
+          <a:xfrm>
+            <a:off x="700000" y="3310000"/>
+            <a:ext cx="90000" cy="850000"/>
+          </a:xfrm>
+          <a:prstGeom prst="rect">
+            <a:avLst/>
+          </a:prstGeom>
+          <a:solidFill>
+            <a:srgbClr val="CC0000"/>
+          </a:solidFill>
+          <a:ln>
+            <a:noFill/>
+          </a:ln>
+        </p:spPr>
+        <p:style>
+          <a:lnRef idx="1">
+            <a:schemeClr val="accent1"/>
+          </a:lnRef>
+          <a:fillRef idx="3">
+            <a:schemeClr val="accent1"/>
+          </a:fillRef>
+          <a:effectRef idx="2">
+            <a:schemeClr val="accent1"/>
+          </a:effectRef>
+          <a:fontRef idx="minor">
+            <a:schemeClr val="lt1"/>
+          </a:fontRef>
+        </p:style>
+        <p:txBody>
+          <a:bodyPr rtlCol="0" anchor="ctr"/>
+          <a:lstStyle/>
+          <a:p>
+            <a:pPr algn="ctr"/>
+          </a:p>
+        </p:txBody>
+      </p:sp>
+      <p:sp>
+        <p:nvSpPr>
+          <p:cNvPr id="16" name="TextBox 15"/>
+          <p:cNvSpPr txBox="1"/>
+          <p:nvPr/>
+        </p:nvSpPr>
+        <p:spPr>
+          <a:xfrm>
+            <a:off x="1000000" y="3390000"/>
+            <a:ext cx="10400000" cy="690000"/>
+          </a:xfrm>
+          <a:prstGeom prst="rect">
+            <a:avLst/>
+          </a:prstGeom>
+          <a:noFill/>
+        </p:spPr>
+        <p:txBody>
+          <a:bodyPr wrap="square" anchor="ctr">
+            <a:spAutoFit/>
+          </a:bodyPr>
+          <a:lstStyle/>
+          <a:p>
+            <a:pPr algn="l"/>
+            <a:r>
+              <a:rPr sz="1300" b="0">
+                <a:solidFill>
+                  <a:srgbClr val="333333"/>
+                </a:solidFill>
+                <a:latin typeface="Open Sans"/>
+                <a:ea typeface="Open Sans"/>
+                <a:cs typeface="Open Sans"/>
+              </a:rPr>
+              <a:t>Оцените сознание и дыхание, вызовите скорую помощь</a:t>
+            </a:r>
+          </a:p>
+        </p:txBody>
+      </p:sp>
+      <p:sp>
+        <p:nvSpPr>
+          <p:cNvPr id="17" name="Rectangle 16"/>
+          <p:cNvSpPr/>
+          <p:nvPr/>
+        </p:nvSpPr>
+        <p:spPr>
+          <a:xfrm>
+            <a:off x="700000" y="4240000"/>
+            <a:ext cx="11000000" cy="850000"/>
+          </a:xfrm>
+          <a:prstGeom prst="rect">
+            <a:avLst/>
+          </a:prstGeom>
+          <a:solidFill>
+            <a:srgbClr val="FFFFFF"/>
+          </a:solidFill>
+          <a:ln w="12700">
+            <a:solidFill>
+              <a:srgbClr val="999999"/>
+            </a:solidFill>
+          </a:ln>
+        </p:spPr>
+        <p:style>
+          <a:lnRef idx="1">
+            <a:schemeClr val="accent1"/>
+          </a:lnRef>
+          <a:fillRef idx="3">
+            <a:schemeClr val="accent1"/>
+          </a:fillRef>
+          <a:effectRef idx="2">
+            <a:schemeClr val="accent1"/>
+          </a:effectRef>
+          <a:fontRef idx="minor">
+            <a:schemeClr val="lt1"/>
+          </a:fontRef>
+        </p:style>
+        <p:txBody>
+          <a:bodyPr rtlCol="0" anchor="ctr"/>
+          <a:lstStyle/>
+          <a:p>
+            <a:pPr algn="ctr"/>
+          </a:p>
+        </p:txBody>
+      </p:sp>
+      <p:sp>
+        <p:nvSpPr>
+          <p:cNvPr id="18" name="Rectangle 17"/>
+          <p:cNvSpPr/>
+          <p:nvPr/>
+        </p:nvSpPr>
+        <p:spPr>
+          <a:xfrm>
+            <a:off x="700000" y="4240000"/>
+            <a:ext cx="90000" cy="850000"/>
+          </a:xfrm>
+          <a:prstGeom prst="rect">
+            <a:avLst/>
+          </a:prstGeom>
+          <a:solidFill>
+            <a:srgbClr val="CC0000"/>
+          </a:solidFill>
+          <a:ln>
+            <a:noFill/>
+          </a:ln>
+        </p:spPr>
+        <p:style>
+          <a:lnRef idx="1">
+            <a:schemeClr val="accent1"/>
+          </a:lnRef>
+          <a:fillRef idx="3">
+            <a:schemeClr val="accent1"/>
+          </a:fillRef>
+          <a:effectRef idx="2">
+            <a:schemeClr val="accent1"/>
+          </a:effectRef>
+          <a:fontRef idx="minor">
+            <a:schemeClr val="lt1"/>
+          </a:fontRef>
+        </p:style>
+        <p:txBody>
+          <a:bodyPr rtlCol="0" anchor="ctr"/>
+          <a:lstStyle/>
+          <a:p>
+            <a:pPr algn="ctr"/>
+          </a:p>
+        </p:txBody>
+      </p:sp>
+      <p:sp>
+        <p:nvSpPr>
+          <p:cNvPr id="19" name="TextBox 18"/>
+          <p:cNvSpPr txBox="1"/>
+          <p:nvPr/>
+        </p:nvSpPr>
+        <p:spPr>
+          <a:xfrm>
+            <a:off x="1000000" y="4320000"/>
+            <a:ext cx="10400000" cy="690000"/>
+          </a:xfrm>
+          <a:prstGeom prst="rect">
+            <a:avLst/>
+          </a:prstGeom>
+          <a:noFill/>
+        </p:spPr>
+        <p:txBody>
+          <a:bodyPr wrap="square" anchor="ctr">
+            <a:spAutoFit/>
+          </a:bodyPr>
+          <a:lstStyle/>
+          <a:p>
+            <a:pPr algn="l"/>
+            <a:r>
+              <a:rPr sz="1300" b="0">
+                <a:solidFill>
+                  <a:srgbClr val="333333"/>
+                </a:solidFill>
+                <a:latin typeface="Open Sans"/>
+                <a:ea typeface="Open Sans"/>
+                <a:cs typeface="Open Sans"/>
+              </a:rPr>
+              <a:t>Без сознания и при ожоге пищевода рвоту не вызывают</a:t>
+            </a:r>
+          </a:p>
+        </p:txBody>
+      </p:sp>
+      <p:sp>
+        <p:nvSpPr>
+          <p:cNvPr id="20" name="Rectangle 19"/>
+          <p:cNvSpPr/>
+          <p:nvPr/>
+        </p:nvSpPr>
+        <p:spPr>
+          <a:xfrm>
+            <a:off x="700000" y="5170000"/>
+            <a:ext cx="11000000" cy="850000"/>
+          </a:xfrm>
+          <a:prstGeom prst="rect">
+            <a:avLst/>
+          </a:prstGeom>
+          <a:solidFill>
+            <a:srgbClr val="FFFFFF"/>
+          </a:solidFill>
+          <a:ln w="12700">
+            <a:solidFill>
+              <a:srgbClr val="999999"/>
+            </a:solidFill>
+          </a:ln>
+        </p:spPr>
+        <p:style>
+          <a:lnRef idx="1">
+            <a:schemeClr val="accent1"/>
+          </a:lnRef>
+          <a:fillRef idx="3">
+            <a:schemeClr val="accent1"/>
+          </a:fillRef>
+          <a:effectRef idx="2">
+            <a:schemeClr val="accent1"/>
+          </a:effectRef>
+          <a:fontRef idx="minor">
+            <a:schemeClr val="lt1"/>
+          </a:fontRef>
+        </p:style>
+        <p:txBody>
+          <a:bodyPr rtlCol="0" anchor="ctr"/>
+          <a:lstStyle/>
+          <a:p>
+            <a:pPr algn="ctr"/>
+          </a:p>
+        </p:txBody>
+      </p:sp>
+      <p:sp>
+        <p:nvSpPr>
+          <p:cNvPr id="21" name="Rectangle 20"/>
+          <p:cNvSpPr/>
+          <p:nvPr/>
+        </p:nvSpPr>
+        <p:spPr>
+          <a:xfrm>
+            <a:off x="700000" y="5170000"/>
+            <a:ext cx="90000" cy="850000"/>
+          </a:xfrm>
+          <a:prstGeom prst="rect">
+            <a:avLst/>
+          </a:prstGeom>
+          <a:solidFill>
+            <a:srgbClr val="CC0000"/>
+          </a:solidFill>
+          <a:ln>
+            <a:noFill/>
+          </a:ln>
+        </p:spPr>
+        <p:style>
+          <a:lnRef idx="1">
+            <a:schemeClr val="accent1"/>
+          </a:lnRef>
+          <a:fillRef idx="3">
+            <a:schemeClr val="accent1"/>
+          </a:fillRef>
+          <a:effectRef idx="2">
+            <a:schemeClr val="accent1"/>
+          </a:effectRef>
+          <a:fontRef idx="minor">
+            <a:schemeClr val="lt1"/>
+          </a:fontRef>
+        </p:style>
+        <p:txBody>
+          <a:bodyPr rtlCol="0" anchor="ctr"/>
+          <a:lstStyle/>
+          <a:p>
+            <a:pPr algn="ctr"/>
+          </a:p>
+        </p:txBody>
+      </p:sp>
+      <p:sp>
+        <p:nvSpPr>
+          <p:cNvPr id="22" name="TextBox 21"/>
+          <p:cNvSpPr txBox="1"/>
+          <p:nvPr/>
+        </p:nvSpPr>
+        <p:spPr>
+          <a:xfrm>
+            <a:off x="1000000" y="5250000"/>
+            <a:ext cx="10400000" cy="690000"/>
+          </a:xfrm>
+          <a:prstGeom prst="rect">
+            <a:avLst/>
+          </a:prstGeom>
+          <a:noFill/>
+        </p:spPr>
+        <p:txBody>
+          <a:bodyPr wrap="square" anchor="ctr">
+            <a:spAutoFit/>
+          </a:bodyPr>
+          <a:lstStyle/>
+          <a:p>
+            <a:pPr algn="l"/>
+            <a:r>
+              <a:rPr sz="1300" b="0">
+                <a:solidFill>
+                  <a:srgbClr val="333333"/>
+                </a:solidFill>
+                <a:latin typeface="Open Sans"/>
+                <a:ea typeface="Open Sans"/>
+                <a:cs typeface="Open Sans"/>
+              </a:rPr>
+              <a:t>Сохраните упаковку или сведения о веществе</a:t>
+            </a:r>
+          </a:p>
+        </p:txBody>
+      </p:sp>
+    </p:spTree>
+  </p:cSld>
+  <p:clrMapOvr>
+    <a:masterClrMapping/>
+  </p:clrMapOvr>
+</p:sld>
+</file>
+
+<file path=ppt/slides/slide14.xml><?xml version="1.0" encoding="utf-8"?>
+<p:sld xmlns:a="http://schemas.openxmlformats.org/drawingml/2006/main" xmlns:p="http://schemas.openxmlformats.org/presentationml/2006/main" xmlns:r="http://schemas.openxmlformats.org/officeDocument/2006/relationships">
+  <p:cSld>
+    <p:spTree>
+      <p:nvGrpSpPr>
+        <p:cNvPr id="1" name=""/>
+        <p:cNvGrpSpPr/>
+        <p:nvPr/>
+      </p:nvGrpSpPr>
+      <p:grpSpPr/>
+      <p:sp>
+        <p:nvSpPr>
+          <p:cNvPr id="2" name="Rectangle 1"/>
+          <p:cNvSpPr/>
+          <p:nvPr/>
+        </p:nvSpPr>
+        <p:spPr>
+          <a:xfrm>
+            <a:off x="0" y="0"/>
+            <a:ext cx="12191695" cy="6858000"/>
+          </a:xfrm>
+          <a:prstGeom prst="rect">
+            <a:avLst/>
+          </a:prstGeom>
+          <a:solidFill>
+            <a:srgbClr val="FFFFFF"/>
+          </a:solidFill>
+          <a:ln>
+            <a:noFill/>
+          </a:ln>
+        </p:spPr>
+        <p:style>
+          <a:lnRef idx="1">
+            <a:schemeClr val="accent1"/>
+          </a:lnRef>
+          <a:fillRef idx="3">
+            <a:schemeClr val="accent1"/>
+          </a:fillRef>
+          <a:effectRef idx="2">
+            <a:schemeClr val="accent1"/>
+          </a:effectRef>
+          <a:fontRef idx="minor">
+            <a:schemeClr val="lt1"/>
+          </a:fontRef>
+        </p:style>
+        <p:txBody>
+          <a:bodyPr rtlCol="0" anchor="ctr"/>
+          <a:lstStyle/>
+          <a:p>
+            <a:pPr algn="ctr"/>
+          </a:p>
+        </p:txBody>
+      </p:sp>
+      <p:sp>
+        <p:nvSpPr>
+          <p:cNvPr id="3" name="TextBox 2"/>
+          <p:cNvSpPr txBox="1"/>
+          <p:nvPr/>
+        </p:nvSpPr>
+        <p:spPr>
+          <a:xfrm>
+            <a:off x="700000" y="250000"/>
+            <a:ext cx="11200000" cy="550000"/>
+          </a:xfrm>
+          <a:prstGeom prst="rect">
+            <a:avLst/>
+          </a:prstGeom>
+          <a:noFill/>
+        </p:spPr>
+        <p:txBody>
+          <a:bodyPr wrap="square" anchor="t">
+            <a:spAutoFit/>
+          </a:bodyPr>
+          <a:lstStyle/>
+          <a:p>
+            <a:pPr algn="l"/>
+            <a:r>
+              <a:rPr sz="2200" b="1">
+                <a:solidFill>
+                  <a:srgbClr val="333333"/>
+                </a:solidFill>
+                <a:latin typeface="Open Sans"/>
+                <a:ea typeface="Open Sans"/>
+                <a:cs typeface="Open Sans"/>
+              </a:rPr>
+              <a:t>ПАМЯТКА</a:t>
+            </a:r>
+          </a:p>
+        </p:txBody>
+      </p:sp>
+      <p:sp>
+        <p:nvSpPr>
+          <p:cNvPr id="4" name="Rectangle 3"/>
+          <p:cNvSpPr/>
+          <p:nvPr/>
+        </p:nvSpPr>
+        <p:spPr>
+          <a:xfrm>
+            <a:off x="700000" y="850000"/>
+            <a:ext cx="9000000" cy="28000"/>
+          </a:xfrm>
+          <a:prstGeom prst="rect">
+            <a:avLst/>
+          </a:prstGeom>
+          <a:solidFill>
+            <a:srgbClr val="555555"/>
+          </a:solidFill>
+          <a:ln>
+            <a:noFill/>
+          </a:ln>
+        </p:spPr>
+        <p:style>
+          <a:lnRef idx="1">
+            <a:schemeClr val="accent1"/>
+          </a:lnRef>
+          <a:fillRef idx="3">
+            <a:schemeClr val="accent1"/>
+          </a:fillRef>
+          <a:effectRef idx="2">
+            <a:schemeClr val="accent1"/>
+          </a:effectRef>
+          <a:fontRef idx="minor">
+            <a:schemeClr val="lt1"/>
+          </a:fontRef>
+        </p:style>
+        <p:txBody>
+          <a:bodyPr rtlCol="0" anchor="ctr"/>
+          <a:lstStyle/>
+          <a:p>
+            <a:pPr algn="ctr"/>
+          </a:p>
+        </p:txBody>
+      </p:sp>
+      <p:sp>
+        <p:nvSpPr>
+          <p:cNvPr id="5" name="TextBox 4"/>
+          <p:cNvSpPr txBox="1"/>
+          <p:nvPr/>
+        </p:nvSpPr>
+        <p:spPr>
+          <a:xfrm>
+            <a:off x="700000" y="920000"/>
+            <a:ext cx="11000000" cy="350000"/>
+          </a:xfrm>
+          <a:prstGeom prst="rect">
+            <a:avLst/>
+          </a:prstGeom>
+          <a:noFill/>
+        </p:spPr>
+        <p:txBody>
+          <a:bodyPr wrap="square" anchor="t">
+            <a:spAutoFit/>
+          </a:bodyPr>
+          <a:lstStyle/>
+          <a:p>
+            <a:pPr algn="l"/>
+            <a:r>
+              <a:rPr sz="1200" b="0">
+                <a:solidFill>
+                  <a:srgbClr val="666666"/>
+                </a:solidFill>
+                <a:latin typeface="Open Sans"/>
+                <a:ea typeface="Open Sans"/>
+                <a:cs typeface="Open Sans"/>
+              </a:rPr>
+              <a:t>Оказание первой помощи при травмах, ранениях и поражениях, прочих состояниях</a:t>
+            </a:r>
+          </a:p>
+        </p:txBody>
+      </p:sp>
+      <p:sp>
+        <p:nvSpPr>
+          <p:cNvPr id="6" name="Rectangle 5"/>
+          <p:cNvSpPr/>
+          <p:nvPr/>
+        </p:nvSpPr>
+        <p:spPr>
+          <a:xfrm>
+            <a:off x="0" y="2800000"/>
+            <a:ext cx="420000" cy="420000"/>
+          </a:xfrm>
+          <a:prstGeom prst="rect">
+            <a:avLst/>
+          </a:prstGeom>
+          <a:solidFill>
+            <a:srgbClr val="555555"/>
+          </a:solidFill>
+          <a:ln>
+            <a:noFill/>
+          </a:ln>
+        </p:spPr>
+        <p:style>
+          <a:lnRef idx="1">
+            <a:schemeClr val="accent1"/>
+          </a:lnRef>
+          <a:fillRef idx="3">
+            <a:schemeClr val="accent1"/>
+          </a:fillRef>
+          <a:effectRef idx="2">
+            <a:schemeClr val="accent1"/>
+          </a:effectRef>
+          <a:fontRef idx="minor">
+            <a:schemeClr val="lt1"/>
+          </a:fontRef>
+        </p:style>
+        <p:txBody>
+          <a:bodyPr rtlCol="0" anchor="ctr"/>
+          <a:lstStyle/>
+          <a:p>
+            <a:pPr algn="ctr"/>
+          </a:p>
+        </p:txBody>
+      </p:sp>
+      <p:sp>
+        <p:nvSpPr>
+          <p:cNvPr id="7" name="TextBox 6"/>
+          <p:cNvSpPr txBox="1"/>
+          <p:nvPr/>
+        </p:nvSpPr>
+        <p:spPr>
+          <a:xfrm>
+            <a:off x="0" y="2800000"/>
+            <a:ext cx="420000" cy="420000"/>
+          </a:xfrm>
+          <a:prstGeom prst="rect">
+            <a:avLst/>
+          </a:prstGeom>
+          <a:noFill/>
+        </p:spPr>
+        <p:txBody>
+          <a:bodyPr wrap="square" anchor="ctr">
+            <a:spAutoFit/>
+          </a:bodyPr>
+          <a:lstStyle/>
+          <a:p>
+            <a:pPr algn="ctr"/>
+            <a:r>
+              <a:rPr sz="1400" b="1">
+                <a:solidFill>
+                  <a:srgbClr val="FFFFFF"/>
+                </a:solidFill>
+                <a:latin typeface="Open Sans"/>
+                <a:ea typeface="Open Sans"/>
+                <a:cs typeface="Open Sans"/>
+              </a:rPr>
+              <a:t>14</a:t>
+            </a:r>
+          </a:p>
+        </p:txBody>
+      </p:sp>
+      <p:pic>
+        <p:nvPicPr>
+          <p:cNvPr id="8" name="Picture 7" descr="pamyatka-tema4-otravleniya-16x9.png"/>
+          <p:cNvPicPr>
+            <a:picLocks noChangeAspect="1"/>
+          </p:cNvPicPr>
+          <p:nvPr/>
+        </p:nvPicPr>
+        <p:blipFill>
+          <a:blip r:embed="rId2"/>
+          <a:stretch>
+            <a:fillRect/>
+          </a:stretch>
+        </p:blipFill>
+        <p:spPr>
+          <a:xfrm>
+            <a:off x="2300000" y="1400000"/>
+            <a:ext cx="7800000" cy="5200000"/>
+          </a:xfrm>
+          <a:prstGeom prst="rect">
+            <a:avLst/>
+          </a:prstGeom>
+        </p:spPr>
+      </p:pic>
+    </p:spTree>
+  </p:cSld>
+  <p:clrMapOvr>
+    <a:masterClrMapping/>
+  </p:clrMapOvr>
+</p:sld>
+</file>
+
+<file path=ppt/slides/slide15.xml><?xml version="1.0" encoding="utf-8"?>
+<p:sld xmlns:a="http://schemas.openxmlformats.org/drawingml/2006/main" xmlns:p="http://schemas.openxmlformats.org/presentationml/2006/main" xmlns:r="http://schemas.openxmlformats.org/officeDocument/2006/relationships">
+  <p:cSld>
+    <p:spTree>
+      <p:nvGrpSpPr>
+        <p:cNvPr id="1" name=""/>
+        <p:cNvGrpSpPr/>
+        <p:nvPr/>
+      </p:nvGrpSpPr>
+      <p:grpSpPr/>
+      <p:sp>
+        <p:nvSpPr>
+          <p:cNvPr id="2" name="Rectangle 1"/>
+          <p:cNvSpPr/>
+          <p:nvPr/>
+        </p:nvSpPr>
+        <p:spPr>
+          <a:xfrm>
+            <a:off x="0" y="0"/>
             <a:ext cx="3400000" cy="6858000"/>
           </a:xfrm>
           <a:prstGeom prst="rect">
@@ -4225,7 +7200,7 @@
                 <a:ea typeface="Open Sans"/>
                 <a:cs typeface="Open Sans"/>
               </a:rPr>
-              <a:t>Что такое отравление</a:t>
+              <a:t>Пути поступления яда</a:t>
             </a:r>
           </a:p>
         </p:txBody>
@@ -4387,7 +7362,7 @@
                 <a:ea typeface="Open Sans"/>
                 <a:cs typeface="Open Sans"/>
               </a:rPr>
-              <a:t>Пути поступления</a:t>
+              <a:t>Проявления</a:t>
             </a:r>
           </a:p>
         </p:txBody>
@@ -4549,7 +7524,7 @@
                 <a:ea typeface="Open Sans"/>
                 <a:cs typeface="Open Sans"/>
               </a:rPr>
-              <a:t>Признаки</a:t>
+              <a:t>Общие принципы</a:t>
             </a:r>
           </a:p>
         </p:txBody>
@@ -4711,7 +7686,7 @@
                 <a:ea typeface="Open Sans"/>
                 <a:cs typeface="Open Sans"/>
               </a:rPr>
-              <a:t>Общий порядок</a:t>
+              <a:t>Особенности удаления яда</a:t>
             </a:r>
           </a:p>
         </p:txBody>
@@ -4873,7 +7848,7 @@
                 <a:ea typeface="Open Sans"/>
                 <a:cs typeface="Open Sans"/>
               </a:rPr>
-              <a:t>Особенности помощи</a:t>
+              <a:t>Контроль и передача</a:t>
             </a:r>
           </a:p>
         </p:txBody>
@@ -4971,7 +7946,7 @@
                 <a:ea typeface="Open Sans"/>
                 <a:cs typeface="Open Sans"/>
               </a:rPr>
-              <a:t>ЧТО ТАКОЕ ОТРАВЛЕНИЕ</a:t>
+              <a:t>ЧТО ОПРЕДЕЛЯЕТ ТЯЖЕСТЬ ОТРАВЛЕНИЯ</a:t>
             </a:r>
           </a:p>
         </p:txBody>
@@ -5144,8 +8119,8 @@
         </p:nvSpPr>
         <p:spPr>
           <a:xfrm>
-            <a:off x="700000" y="1600000"/>
-            <a:ext cx="11000000" cy="4200000"/>
+            <a:off x="700000" y="1500000"/>
+            <a:ext cx="11000000" cy="4100000"/>
           </a:xfrm>
           <a:prstGeom prst="rect">
             <a:avLst/>
@@ -5160,7 +8135,7 @@
           <a:p>
             <a:pPr algn="l"/>
             <a:r>
-              <a:rPr sz="1600" b="0">
+              <a:rPr sz="1500" b="0">
                 <a:solidFill>
                   <a:srgbClr val="333333"/>
                 </a:solidFill>
@@ -5168,7 +8143,87 @@
                 <a:ea typeface="Open Sans"/>
                 <a:cs typeface="Open Sans"/>
               </a:rPr>
-              <a:t>Отравление — нарушение здоровья из-за попадания в организм токсичного вещества. Тяжесть зависит от вещества, дозы, пути поступления и времени воздействия.</a:t>
+              <a:t>Отравление — нарушение здоровья при поступлении токсичного вещества в организм. Проявления и тяжесть зависят от вида вещества, его количества и концентрации, пути поступления, продолжительности воздействия, возраста и состояния пострадавшего.</a:t>
+            </a:r>
+          </a:p>
+        </p:txBody>
+      </p:sp>
+      <p:sp>
+        <p:nvSpPr>
+          <p:cNvPr id="9" name="Rounded Rectangle 8"/>
+          <p:cNvSpPr/>
+          <p:nvPr/>
+        </p:nvSpPr>
+        <p:spPr>
+          <a:xfrm>
+            <a:off x="700000" y="5600000"/>
+            <a:ext cx="11000000" cy="1000000"/>
+          </a:xfrm>
+          <a:prstGeom prst="roundRect">
+            <a:avLst/>
+          </a:prstGeom>
+          <a:solidFill>
+            <a:srgbClr val="F5F0E1"/>
+          </a:solidFill>
+          <a:ln>
+            <a:noFill/>
+          </a:ln>
+        </p:spPr>
+        <p:style>
+          <a:lnRef idx="1">
+            <a:schemeClr val="accent1"/>
+          </a:lnRef>
+          <a:fillRef idx="3">
+            <a:schemeClr val="accent1"/>
+          </a:fillRef>
+          <a:effectRef idx="2">
+            <a:schemeClr val="accent1"/>
+          </a:effectRef>
+          <a:fontRef idx="minor">
+            <a:schemeClr val="lt1"/>
+          </a:fontRef>
+        </p:style>
+        <p:txBody>
+          <a:bodyPr rtlCol="0" anchor="ctr"/>
+          <a:lstStyle/>
+          <a:p>
+            <a:pPr algn="ctr"/>
+          </a:p>
+        </p:txBody>
+      </p:sp>
+      <p:sp>
+        <p:nvSpPr>
+          <p:cNvPr id="10" name="TextBox 9"/>
+          <p:cNvSpPr txBox="1"/>
+          <p:nvPr/>
+        </p:nvSpPr>
+        <p:spPr>
+          <a:xfrm>
+            <a:off x="950000" y="5800000"/>
+            <a:ext cx="10500000" cy="600000"/>
+          </a:xfrm>
+          <a:prstGeom prst="rect">
+            <a:avLst/>
+          </a:prstGeom>
+          <a:noFill/>
+        </p:spPr>
+        <p:txBody>
+          <a:bodyPr wrap="square" anchor="ctr">
+            <a:spAutoFit/>
+          </a:bodyPr>
+          <a:lstStyle/>
+          <a:p>
+            <a:pPr algn="l"/>
+            <a:r>
+              <a:rPr sz="1200" b="0">
+                <a:solidFill>
+                  <a:srgbClr val="333333"/>
+                </a:solidFill>
+                <a:latin typeface="Open Sans"/>
+                <a:ea typeface="Open Sans"/>
+                <a:cs typeface="Open Sans"/>
+              </a:rPr>
+              <a:t>Даже при отсутствии признаков состояние может ухудшиться позднее, поэтому важны ранний вызов и наблюдение.</a:t>
             </a:r>
           </a:p>
         </p:txBody>
@@ -5266,7 +8321,7 @@
                 <a:ea typeface="Open Sans"/>
                 <a:cs typeface="Open Sans"/>
               </a:rPr>
-              <a:t>ЧЕТЫРЕ ПУТИ ПОСТУПЛЕНИЯ ЯДА</a:t>
+              <a:t>ЧЕТЫРЕ ПУТИ ПОСТУПЛЕНИЯ</a:t>
             </a:r>
           </a:p>
         </p:txBody>
@@ -5439,8 +8494,8 @@
         </p:nvSpPr>
         <p:spPr>
           <a:xfrm>
-            <a:off x="700000" y="1450000"/>
-            <a:ext cx="5375000" cy="2300000"/>
+            <a:off x="700000" y="1400000"/>
+            <a:ext cx="5400000" cy="2420000"/>
           </a:xfrm>
           <a:prstGeom prst="rect">
             <a:avLst/>
@@ -5484,8 +8539,8 @@
         </p:nvSpPr>
         <p:spPr>
           <a:xfrm>
-            <a:off x="850000" y="1650000"/>
-            <a:ext cx="500000" cy="500000"/>
+            <a:off x="820000" y="1550000"/>
+            <a:ext cx="450000" cy="450000"/>
           </a:xfrm>
           <a:prstGeom prst="ellipse">
             <a:avLst/>
@@ -5527,8 +8582,8 @@
         </p:nvSpPr>
         <p:spPr>
           <a:xfrm>
-            <a:off x="850000" y="1650000"/>
-            <a:ext cx="500000" cy="500000"/>
+            <a:off x="820000" y="1550000"/>
+            <a:ext cx="450000" cy="450000"/>
           </a:xfrm>
           <a:prstGeom prst="rect">
             <a:avLst/>
@@ -5543,7 +8598,7 @@
           <a:p>
             <a:pPr algn="ctr"/>
             <a:r>
-              <a:rPr sz="1400" b="1">
+              <a:rPr sz="1300" b="1">
                 <a:solidFill>
                   <a:srgbClr val="FFFFFF"/>
                 </a:solidFill>
@@ -5564,8 +8619,8 @@
         </p:nvSpPr>
         <p:spPr>
           <a:xfrm>
-            <a:off x="1450000" y="1700000"/>
-            <a:ext cx="4475000" cy="450000"/>
+            <a:off x="1350000" y="1580000"/>
+            <a:ext cx="4600000" cy="400000"/>
           </a:xfrm>
           <a:prstGeom prst="rect">
             <a:avLst/>
@@ -5580,7 +8635,7 @@
           <a:p>
             <a:pPr algn="l"/>
             <a:r>
-              <a:rPr sz="1300" b="1">
+              <a:rPr sz="1200" b="1">
                 <a:solidFill>
                   <a:srgbClr val="333333"/>
                 </a:solidFill>
@@ -5588,7 +8643,7 @@
                 <a:ea typeface="Open Sans"/>
                 <a:cs typeface="Open Sans"/>
               </a:rPr>
-              <a:t>Через пищеварительный тракт</a:t>
+              <a:t>Через рот</a:t>
             </a:r>
           </a:p>
         </p:txBody>
@@ -5601,8 +8656,8 @@
         </p:nvSpPr>
         <p:spPr>
           <a:xfrm>
-            <a:off x="850000" y="2300000"/>
-            <a:ext cx="5075000" cy="1300000"/>
+            <a:off x="820000" y="2100000"/>
+            <a:ext cx="5160000" cy="1570000"/>
           </a:xfrm>
           <a:prstGeom prst="rect">
             <a:avLst/>
@@ -5625,7 +8680,7 @@
                 <a:ea typeface="Open Sans"/>
                 <a:cs typeface="Open Sans"/>
               </a:rPr>
-              <a:t>Пища, напитки, лекарства, бытовая химия.</a:t>
+              <a:t>Пища, напитки, лекарства, алкоголь, растения, бытовая химия и другие проглоченные вещества.</a:t>
             </a:r>
           </a:p>
         </p:txBody>
@@ -5638,8 +8693,8 @@
         </p:nvSpPr>
         <p:spPr>
           <a:xfrm>
-            <a:off x="6325000" y="1450000"/>
-            <a:ext cx="5375000" cy="2300000"/>
+            <a:off x="6300000" y="1400000"/>
+            <a:ext cx="5400000" cy="2420000"/>
           </a:xfrm>
           <a:prstGeom prst="rect">
             <a:avLst/>
@@ -5683,8 +8738,8 @@
         </p:nvSpPr>
         <p:spPr>
           <a:xfrm>
-            <a:off x="6475000" y="1650000"/>
-            <a:ext cx="500000" cy="500000"/>
+            <a:off x="6420000" y="1550000"/>
+            <a:ext cx="450000" cy="450000"/>
           </a:xfrm>
           <a:prstGeom prst="ellipse">
             <a:avLst/>
@@ -5726,8 +8781,8 @@
         </p:nvSpPr>
         <p:spPr>
           <a:xfrm>
-            <a:off x="6475000" y="1650000"/>
-            <a:ext cx="500000" cy="500000"/>
+            <a:off x="6420000" y="1550000"/>
+            <a:ext cx="450000" cy="450000"/>
           </a:xfrm>
           <a:prstGeom prst="rect">
             <a:avLst/>
@@ -5742,7 +8797,7 @@
           <a:p>
             <a:pPr algn="ctr"/>
             <a:r>
-              <a:rPr sz="1400" b="1">
+              <a:rPr sz="1300" b="1">
                 <a:solidFill>
                   <a:srgbClr val="FFFFFF"/>
                 </a:solidFill>
@@ -5763,8 +8818,8 @@
         </p:nvSpPr>
         <p:spPr>
           <a:xfrm>
-            <a:off x="7075000" y="1700000"/>
-            <a:ext cx="4475000" cy="450000"/>
+            <a:off x="6950000" y="1580000"/>
+            <a:ext cx="4600000" cy="400000"/>
           </a:xfrm>
           <a:prstGeom prst="rect">
             <a:avLst/>
@@ -5779,7 +8834,7 @@
           <a:p>
             <a:pPr algn="l"/>
             <a:r>
-              <a:rPr sz="1300" b="1">
+              <a:rPr sz="1200" b="1">
                 <a:solidFill>
                   <a:srgbClr val="333333"/>
                 </a:solidFill>
@@ -5787,7 +8842,7 @@
                 <a:ea typeface="Open Sans"/>
                 <a:cs typeface="Open Sans"/>
               </a:rPr>
-              <a:t>Через дыхательные пути</a:t>
+              <a:t>Через дыхание</a:t>
             </a:r>
           </a:p>
         </p:txBody>
@@ -5800,8 +8855,8 @@
         </p:nvSpPr>
         <p:spPr>
           <a:xfrm>
-            <a:off x="6475000" y="2300000"/>
-            <a:ext cx="5075000" cy="1300000"/>
+            <a:off x="6420000" y="2100000"/>
+            <a:ext cx="5160000" cy="1570000"/>
           </a:xfrm>
           <a:prstGeom prst="rect">
             <a:avLst/>
@@ -5824,7 +8879,7 @@
                 <a:ea typeface="Open Sans"/>
                 <a:cs typeface="Open Sans"/>
               </a:rPr>
-              <a:t>Газы, пары, дым и аэрозоли.</a:t>
+              <a:t>Угарный газ, дым, пары растворителей, бытовой газ, производственные газы и аэрозоли.</a:t>
             </a:r>
           </a:p>
         </p:txBody>
@@ -5837,8 +8892,8 @@
         </p:nvSpPr>
         <p:spPr>
           <a:xfrm>
-            <a:off x="700000" y="3950000"/>
-            <a:ext cx="5375000" cy="2300000"/>
+            <a:off x="700000" y="3980000"/>
+            <a:ext cx="5400000" cy="2420000"/>
           </a:xfrm>
           <a:prstGeom prst="rect">
             <a:avLst/>
@@ -5882,8 +8937,8 @@
         </p:nvSpPr>
         <p:spPr>
           <a:xfrm>
-            <a:off x="850000" y="4150000"/>
-            <a:ext cx="500000" cy="500000"/>
+            <a:off x="820000" y="4130000"/>
+            <a:ext cx="450000" cy="450000"/>
           </a:xfrm>
           <a:prstGeom prst="ellipse">
             <a:avLst/>
@@ -5925,8 +8980,8 @@
         </p:nvSpPr>
         <p:spPr>
           <a:xfrm>
-            <a:off x="850000" y="4150000"/>
-            <a:ext cx="500000" cy="500000"/>
+            <a:off x="820000" y="4130000"/>
+            <a:ext cx="450000" cy="450000"/>
           </a:xfrm>
           <a:prstGeom prst="rect">
             <a:avLst/>
@@ -5941,7 +8996,7 @@
           <a:p>
             <a:pPr algn="ctr"/>
             <a:r>
-              <a:rPr sz="1400" b="1">
+              <a:rPr sz="1300" b="1">
                 <a:solidFill>
                   <a:srgbClr val="FFFFFF"/>
                 </a:solidFill>
@@ -5962,8 +9017,8 @@
         </p:nvSpPr>
         <p:spPr>
           <a:xfrm>
-            <a:off x="1450000" y="4200000"/>
-            <a:ext cx="4475000" cy="450000"/>
+            <a:off x="1350000" y="4160000"/>
+            <a:ext cx="4600000" cy="400000"/>
           </a:xfrm>
           <a:prstGeom prst="rect">
             <a:avLst/>
@@ -5978,7 +9033,7 @@
           <a:p>
             <a:pPr algn="l"/>
             <a:r>
-              <a:rPr sz="1300" b="1">
+              <a:rPr sz="1200" b="1">
                 <a:solidFill>
                   <a:srgbClr val="333333"/>
                 </a:solidFill>
@@ -5999,8 +9054,8 @@
         </p:nvSpPr>
         <p:spPr>
           <a:xfrm>
-            <a:off x="850000" y="4800000"/>
-            <a:ext cx="5075000" cy="1300000"/>
+            <a:off x="820000" y="4680000"/>
+            <a:ext cx="5160000" cy="1570000"/>
           </a:xfrm>
           <a:prstGeom prst="rect">
             <a:avLst/>
@@ -6023,7 +9078,7 @@
                 <a:ea typeface="Open Sans"/>
                 <a:cs typeface="Open Sans"/>
               </a:rPr>
-              <a:t>Жидкости и вещества на коже или одежде.</a:t>
+              <a:t>Жидкости, порошки и растворы, способные повреждать кожу или всасываться через нее.</a:t>
             </a:r>
           </a:p>
         </p:txBody>
@@ -6036,8 +9091,8 @@
         </p:nvSpPr>
         <p:spPr>
           <a:xfrm>
-            <a:off x="6325000" y="3950000"/>
-            <a:ext cx="5375000" cy="2300000"/>
+            <a:off x="6300000" y="3980000"/>
+            <a:ext cx="5400000" cy="2420000"/>
           </a:xfrm>
           <a:prstGeom prst="rect">
             <a:avLst/>
@@ -6081,8 +9136,8 @@
         </p:nvSpPr>
         <p:spPr>
           <a:xfrm>
-            <a:off x="6475000" y="4150000"/>
-            <a:ext cx="500000" cy="500000"/>
+            <a:off x="6420000" y="4130000"/>
+            <a:ext cx="450000" cy="450000"/>
           </a:xfrm>
           <a:prstGeom prst="ellipse">
             <a:avLst/>
@@ -6124,8 +9179,8 @@
         </p:nvSpPr>
         <p:spPr>
           <a:xfrm>
-            <a:off x="6475000" y="4150000"/>
-            <a:ext cx="500000" cy="500000"/>
+            <a:off x="6420000" y="4130000"/>
+            <a:ext cx="450000" cy="450000"/>
           </a:xfrm>
           <a:prstGeom prst="rect">
             <a:avLst/>
@@ -6140,7 +9195,7 @@
           <a:p>
             <a:pPr algn="ctr"/>
             <a:r>
-              <a:rPr sz="1400" b="1">
+              <a:rPr sz="1300" b="1">
                 <a:solidFill>
                   <a:srgbClr val="FFFFFF"/>
                 </a:solidFill>
@@ -6161,8 +9216,8 @@
         </p:nvSpPr>
         <p:spPr>
           <a:xfrm>
-            <a:off x="7075000" y="4200000"/>
-            <a:ext cx="4475000" cy="450000"/>
+            <a:off x="6950000" y="4160000"/>
+            <a:ext cx="4600000" cy="400000"/>
           </a:xfrm>
           <a:prstGeom prst="rect">
             <a:avLst/>
@@ -6177,7 +9232,7 @@
           <a:p>
             <a:pPr algn="l"/>
             <a:r>
-              <a:rPr sz="1300" b="1">
+              <a:rPr sz="1200" b="1">
                 <a:solidFill>
                   <a:srgbClr val="333333"/>
                 </a:solidFill>
@@ -6198,8 +9253,8 @@
         </p:nvSpPr>
         <p:spPr>
           <a:xfrm>
-            <a:off x="6475000" y="4800000"/>
-            <a:ext cx="5075000" cy="1300000"/>
+            <a:off x="6420000" y="4680000"/>
+            <a:ext cx="5160000" cy="1570000"/>
           </a:xfrm>
           <a:prstGeom prst="rect">
             <a:avLst/>
@@ -6222,7 +9277,7 @@
                 <a:ea typeface="Open Sans"/>
                 <a:cs typeface="Open Sans"/>
               </a:rPr>
-              <a:t>Инъекции, укусы и ужаливания.</a:t>
+              <a:t>Инъекция, укус животного, змеи или насекомого, при которых вещество попадает в ткани.</a:t>
             </a:r>
           </a:p>
         </p:txBody>
@@ -6320,7 +9375,7 @@
                 <a:ea typeface="Open Sans"/>
                 <a:cs typeface="Open Sans"/>
               </a:rPr>
-              <a:t>ВОЗМОЖНЫЕ ПРИЗНАКИ</a:t>
+              <a:t>ВОЗМОЖНЫЕ ПРОЯВЛЕНИЯ</a:t>
             </a:r>
           </a:p>
         </p:txBody>
@@ -6493,8 +9548,82 @@
         </p:nvSpPr>
         <p:spPr>
           <a:xfrm>
-            <a:off x="700000" y="1500000"/>
-            <a:ext cx="11000000" cy="4200000"/>
+            <a:off x="700000" y="1400000"/>
+            <a:ext cx="5400000" cy="400000"/>
+          </a:xfrm>
+          <a:prstGeom prst="rect">
+            <a:avLst/>
+          </a:prstGeom>
+          <a:noFill/>
+        </p:spPr>
+        <p:txBody>
+          <a:bodyPr wrap="square" anchor="t">
+            <a:spAutoFit/>
+          </a:bodyPr>
+          <a:lstStyle/>
+          <a:p>
+            <a:pPr algn="l"/>
+            <a:r>
+              <a:rPr sz="1400" b="1">
+                <a:solidFill>
+                  <a:srgbClr val="333333"/>
+                </a:solidFill>
+                <a:latin typeface="Open Sans"/>
+                <a:ea typeface="Open Sans"/>
+                <a:cs typeface="Open Sans"/>
+              </a:rPr>
+              <a:t>Общие признаки</a:t>
+            </a:r>
+          </a:p>
+        </p:txBody>
+      </p:sp>
+      <p:sp>
+        <p:nvSpPr>
+          <p:cNvPr id="9" name="TextBox 8"/>
+          <p:cNvSpPr txBox="1"/>
+          <p:nvPr/>
+        </p:nvSpPr>
+        <p:spPr>
+          <a:xfrm>
+            <a:off x="6600000" y="1400000"/>
+            <a:ext cx="5400000" cy="400000"/>
+          </a:xfrm>
+          <a:prstGeom prst="rect">
+            <a:avLst/>
+          </a:prstGeom>
+          <a:noFill/>
+        </p:spPr>
+        <p:txBody>
+          <a:bodyPr wrap="square" anchor="t">
+            <a:spAutoFit/>
+          </a:bodyPr>
+          <a:lstStyle/>
+          <a:p>
+            <a:pPr algn="l"/>
+            <a:r>
+              <a:rPr sz="1400" b="1">
+                <a:solidFill>
+                  <a:srgbClr val="333333"/>
+                </a:solidFill>
+                <a:latin typeface="Open Sans"/>
+                <a:ea typeface="Open Sans"/>
+                <a:cs typeface="Open Sans"/>
+              </a:rPr>
+              <a:t>Местные и пищеварительные</a:t>
+            </a:r>
+          </a:p>
+        </p:txBody>
+      </p:sp>
+      <p:sp>
+        <p:nvSpPr>
+          <p:cNvPr id="10" name="TextBox 9"/>
+          <p:cNvSpPr txBox="1"/>
+          <p:nvPr/>
+        </p:nvSpPr>
+        <p:spPr>
+          <a:xfrm>
+            <a:off x="700000" y="1850000"/>
+            <a:ext cx="5400000" cy="4000000"/>
           </a:xfrm>
           <a:prstGeom prst="rect">
             <a:avLst/>
@@ -6513,7 +9642,7 @@
               </a:spcAft>
             </a:pPr>
             <a:r>
-              <a:rPr sz="1400" b="0">
+              <a:rPr sz="1300" b="0">
                 <a:solidFill>
                   <a:srgbClr val="333333"/>
                 </a:solidFill>
@@ -6521,7 +9650,7 @@
                 <a:ea typeface="Open Sans"/>
                 <a:cs typeface="Open Sans"/>
               </a:rPr>
-              <a:t>•  тошнота, рвота, боль в животе</a:t>
+              <a:t>•  слабость, головная боль и головокружение</a:t>
             </a:r>
           </a:p>
           <a:p>
@@ -6531,7 +9660,7 @@
               </a:spcAft>
             </a:pPr>
             <a:r>
-              <a:rPr sz="1400" b="0">
+              <a:rPr sz="1300" b="0">
                 <a:solidFill>
                   <a:srgbClr val="333333"/>
                 </a:solidFill>
@@ -6539,7 +9668,7 @@
                 <a:ea typeface="Open Sans"/>
                 <a:cs typeface="Open Sans"/>
               </a:rPr>
-              <a:t>•  головная боль, слабость, головокружение</a:t>
+              <a:t>•  бледность, потливость или изменение цвета кожи</a:t>
             </a:r>
           </a:p>
           <a:p>
@@ -6549,7 +9678,7 @@
               </a:spcAft>
             </a:pPr>
             <a:r>
-              <a:rPr sz="1400" b="0">
+              <a:rPr sz="1300" b="0">
                 <a:solidFill>
                   <a:srgbClr val="333333"/>
                 </a:solidFill>
@@ -6557,7 +9686,7 @@
                 <a:ea typeface="Open Sans"/>
                 <a:cs typeface="Open Sans"/>
               </a:rPr>
-              <a:t>•  необычное возбуждение или сонливость</a:t>
+              <a:t>•  возбуждение, сонливость, спутанность или потеря сознания</a:t>
             </a:r>
           </a:p>
           <a:p>
@@ -6567,7 +9696,7 @@
               </a:spcAft>
             </a:pPr>
             <a:r>
-              <a:rPr sz="1400" b="0">
+              <a:rPr sz="1300" b="0">
                 <a:solidFill>
                   <a:srgbClr val="333333"/>
                 </a:solidFill>
@@ -6575,9 +9704,32 @@
                 <a:ea typeface="Open Sans"/>
                 <a:cs typeface="Open Sans"/>
               </a:rPr>
-              <a:t>•  затрудненное дыхание</a:t>
-            </a:r>
-          </a:p>
+              <a:t>•  нарушение дыхания, судороги и расстройство координации</a:t>
+            </a:r>
+          </a:p>
+        </p:txBody>
+      </p:sp>
+      <p:sp>
+        <p:nvSpPr>
+          <p:cNvPr id="11" name="TextBox 10"/>
+          <p:cNvSpPr txBox="1"/>
+          <p:nvPr/>
+        </p:nvSpPr>
+        <p:spPr>
+          <a:xfrm>
+            <a:off x="6600000" y="1850000"/>
+            <a:ext cx="5400000" cy="4000000"/>
+          </a:xfrm>
+          <a:prstGeom prst="rect">
+            <a:avLst/>
+          </a:prstGeom>
+          <a:noFill/>
+        </p:spPr>
+        <p:txBody>
+          <a:bodyPr wrap="square">
+            <a:spAutoFit/>
+          </a:bodyPr>
+          <a:lstStyle/>
           <a:p>
             <a:pPr algn="l">
               <a:spcAft>
@@ -6585,7 +9737,7 @@
               </a:spcAft>
             </a:pPr>
             <a:r>
-              <a:rPr sz="1400" b="0">
+              <a:rPr sz="1300" b="0">
                 <a:solidFill>
                   <a:srgbClr val="333333"/>
                 </a:solidFill>
@@ -6593,7 +9745,7 @@
                 <a:ea typeface="Open Sans"/>
                 <a:cs typeface="Open Sans"/>
               </a:rPr>
-              <a:t>•  судороги или потеря сознания</a:t>
+              <a:t>•  тошнота, рвота, боль в животе и нарушение стула</a:t>
             </a:r>
           </a:p>
           <a:p>
@@ -6603,7 +9755,7 @@
               </a:spcAft>
             </a:pPr>
             <a:r>
-              <a:rPr sz="1400" b="0">
+              <a:rPr sz="1300" b="0">
                 <a:solidFill>
                   <a:srgbClr val="333333"/>
                 </a:solidFill>
@@ -6611,77 +9763,15 @@
                 <a:ea typeface="Open Sans"/>
                 <a:cs typeface="Open Sans"/>
               </a:rPr>
-              <a:t>•  ожоги и следы вещества на коже или у рта</a:t>
-            </a:r>
-          </a:p>
-        </p:txBody>
-      </p:sp>
-      <p:sp>
-        <p:nvSpPr>
-          <p:cNvPr id="9" name="Rounded Rectangle 8"/>
-          <p:cNvSpPr/>
-          <p:nvPr/>
-        </p:nvSpPr>
-        <p:spPr>
-          <a:xfrm>
-            <a:off x="700000" y="5600000"/>
-            <a:ext cx="11000000" cy="1000000"/>
-          </a:xfrm>
-          <a:prstGeom prst="roundRect">
-            <a:avLst/>
-          </a:prstGeom>
-          <a:solidFill>
-            <a:srgbClr val="F5F0E1"/>
-          </a:solidFill>
-          <a:ln>
-            <a:noFill/>
-          </a:ln>
-        </p:spPr>
-        <p:style>
-          <a:lnRef idx="1">
-            <a:schemeClr val="accent1"/>
-          </a:lnRef>
-          <a:fillRef idx="3">
-            <a:schemeClr val="accent1"/>
-          </a:fillRef>
-          <a:effectRef idx="2">
-            <a:schemeClr val="accent1"/>
-          </a:effectRef>
-          <a:fontRef idx="minor">
-            <a:schemeClr val="lt1"/>
-          </a:fontRef>
-        </p:style>
-        <p:txBody>
-          <a:bodyPr rtlCol="0" anchor="ctr"/>
-          <a:lstStyle/>
-          <a:p>
-            <a:pPr algn="ctr"/>
-          </a:p>
-        </p:txBody>
-      </p:sp>
-      <p:sp>
-        <p:nvSpPr>
-          <p:cNvPr id="10" name="TextBox 9"/>
-          <p:cNvSpPr txBox="1"/>
-          <p:nvPr/>
-        </p:nvSpPr>
-        <p:spPr>
-          <a:xfrm>
-            <a:off x="950000" y="5800000"/>
-            <a:ext cx="10500000" cy="600000"/>
-          </a:xfrm>
-          <a:prstGeom prst="rect">
-            <a:avLst/>
-          </a:prstGeom>
-          <a:noFill/>
-        </p:spPr>
-        <p:txBody>
-          <a:bodyPr wrap="square" anchor="ctr">
-            <a:spAutoFit/>
-          </a:bodyPr>
-          <a:lstStyle/>
-          <a:p>
-            <a:pPr algn="l"/>
+              <a:t>•  необычный запах изо рта или в помещении</a:t>
+            </a:r>
+          </a:p>
+          <a:p>
+            <a:pPr algn="l">
+              <a:spcAft>
+                <a:spcPts val="800"/>
+              </a:spcAft>
+            </a:pPr>
             <a:r>
               <a:rPr sz="1300" b="0">
                 <a:solidFill>
@@ -6691,7 +9781,25 @@
                 <a:ea typeface="Open Sans"/>
                 <a:cs typeface="Open Sans"/>
               </a:rPr>
-              <a:t>Признаки зависят от вещества и могут быстро усиливаться.</a:t>
+              <a:t>•  ожоги, пятна и следы вещества около рта или на коже</a:t>
+            </a:r>
+          </a:p>
+          <a:p>
+            <a:pPr algn="l">
+              <a:spcAft>
+                <a:spcPts val="800"/>
+              </a:spcAft>
+            </a:pPr>
+            <a:r>
+              <a:rPr sz="1300" b="0">
+                <a:solidFill>
+                  <a:srgbClr val="333333"/>
+                </a:solidFill>
+                <a:latin typeface="Open Sans"/>
+                <a:ea typeface="Open Sans"/>
+                <a:cs typeface="Open Sans"/>
+              </a:rPr>
+              <a:t>•  боль, покраснение, отек в месте укуса или введения</a:t>
             </a:r>
           </a:p>
         </p:txBody>
@@ -6789,7 +9897,7 @@
                 <a:ea typeface="Open Sans"/>
                 <a:cs typeface="Open Sans"/>
               </a:rPr>
-              <a:t>ОБЩИЕ ПРИНЦИПЫ ПОМОЩИ</a:t>
+              <a:t>ОБЩИЕ ПРИНЦИПЫ ПЕРВОЙ ПОМОЩИ</a:t>
             </a:r>
           </a:p>
         </p:txBody>
@@ -6962,8 +10070,8 @@
         </p:nvSpPr>
         <p:spPr>
           <a:xfrm>
-            <a:off x="700000" y="1450000"/>
-            <a:ext cx="550000" cy="550000"/>
+            <a:off x="700000" y="1400000"/>
+            <a:ext cx="500000" cy="500000"/>
           </a:xfrm>
           <a:prstGeom prst="ellipse">
             <a:avLst/>
@@ -7005,8 +10113,8 @@
         </p:nvSpPr>
         <p:spPr>
           <a:xfrm>
-            <a:off x="700000" y="1450000"/>
-            <a:ext cx="550000" cy="550000"/>
+            <a:off x="700000" y="1400000"/>
+            <a:ext cx="500000" cy="500000"/>
           </a:xfrm>
           <a:prstGeom prst="rect">
             <a:avLst/>
@@ -7021,7 +10129,7 @@
           <a:p>
             <a:pPr algn="ctr"/>
             <a:r>
-              <a:rPr sz="1400" b="1">
+              <a:rPr sz="1300" b="1">
                 <a:solidFill>
                   <a:srgbClr val="FFFFFF"/>
                 </a:solidFill>
@@ -7042,8 +10150,8 @@
         </p:nvSpPr>
         <p:spPr>
           <a:xfrm>
-            <a:off x="1450000" y="1450000"/>
-            <a:ext cx="10500000" cy="550000"/>
+            <a:off x="1400000" y="1400000"/>
+            <a:ext cx="10550000" cy="620000"/>
           </a:xfrm>
           <a:prstGeom prst="rect">
             <a:avLst/>
@@ -7087,8 +10195,8 @@
         </p:nvSpPr>
         <p:spPr>
           <a:xfrm>
-            <a:off x="1650000" y="1450000"/>
-            <a:ext cx="10100000" cy="550000"/>
+            <a:off x="1600000" y="1400000"/>
+            <a:ext cx="10150000" cy="620000"/>
           </a:xfrm>
           <a:prstGeom prst="rect">
             <a:avLst/>
@@ -7111,7 +10219,7 @@
                 <a:ea typeface="Open Sans"/>
                 <a:cs typeface="Open Sans"/>
               </a:rPr>
-              <a:t>Обеспечьте безопасность и прекратите воздействие яда.</a:t>
+              <a:t>Оцените опасность вещества для себя, окружающих и пострадавшего.</a:t>
             </a:r>
           </a:p>
         </p:txBody>
@@ -7124,8 +10232,8 @@
         </p:nvSpPr>
         <p:spPr>
           <a:xfrm>
-            <a:off x="700000" y="2320000"/>
-            <a:ext cx="550000" cy="550000"/>
+            <a:off x="700000" y="2100000"/>
+            <a:ext cx="500000" cy="500000"/>
           </a:xfrm>
           <a:prstGeom prst="ellipse">
             <a:avLst/>
@@ -7167,8 +10275,8 @@
         </p:nvSpPr>
         <p:spPr>
           <a:xfrm>
-            <a:off x="700000" y="2320000"/>
-            <a:ext cx="550000" cy="550000"/>
+            <a:off x="700000" y="2100000"/>
+            <a:ext cx="500000" cy="500000"/>
           </a:xfrm>
           <a:prstGeom prst="rect">
             <a:avLst/>
@@ -7183,7 +10291,7 @@
           <a:p>
             <a:pPr algn="ctr"/>
             <a:r>
-              <a:rPr sz="1400" b="1">
+              <a:rPr sz="1300" b="1">
                 <a:solidFill>
                   <a:srgbClr val="FFFFFF"/>
                 </a:solidFill>
@@ -7204,8 +10312,8 @@
         </p:nvSpPr>
         <p:spPr>
           <a:xfrm>
-            <a:off x="1450000" y="2320000"/>
-            <a:ext cx="10500000" cy="550000"/>
+            <a:off x="1400000" y="2100000"/>
+            <a:ext cx="10550000" cy="620000"/>
           </a:xfrm>
           <a:prstGeom prst="rect">
             <a:avLst/>
@@ -7249,8 +10357,8 @@
         </p:nvSpPr>
         <p:spPr>
           <a:xfrm>
-            <a:off x="1650000" y="2320000"/>
-            <a:ext cx="10100000" cy="550000"/>
+            <a:off x="1600000" y="2100000"/>
+            <a:ext cx="10150000" cy="620000"/>
           </a:xfrm>
           <a:prstGeom prst="rect">
             <a:avLst/>
@@ -7273,7 +10381,7 @@
                 <a:ea typeface="Open Sans"/>
                 <a:cs typeface="Open Sans"/>
               </a:rPr>
-              <a:t>Выясните: что за вещество, сколько попало и когда.</a:t>
+              <a:t>Прекратите поступление яда безопасным для выбранного пути способом.</a:t>
             </a:r>
           </a:p>
         </p:txBody>
@@ -7286,8 +10394,8 @@
         </p:nvSpPr>
         <p:spPr>
           <a:xfrm>
-            <a:off x="700000" y="3190000"/>
-            <a:ext cx="550000" cy="550000"/>
+            <a:off x="700000" y="2800000"/>
+            <a:ext cx="500000" cy="500000"/>
           </a:xfrm>
           <a:prstGeom prst="ellipse">
             <a:avLst/>
@@ -7329,8 +10437,8 @@
         </p:nvSpPr>
         <p:spPr>
           <a:xfrm>
-            <a:off x="700000" y="3190000"/>
-            <a:ext cx="550000" cy="550000"/>
+            <a:off x="700000" y="2800000"/>
+            <a:ext cx="500000" cy="500000"/>
           </a:xfrm>
           <a:prstGeom prst="rect">
             <a:avLst/>
@@ -7345,7 +10453,7 @@
           <a:p>
             <a:pPr algn="ctr"/>
             <a:r>
-              <a:rPr sz="1400" b="1">
+              <a:rPr sz="1300" b="1">
                 <a:solidFill>
                   <a:srgbClr val="FFFFFF"/>
                 </a:solidFill>
@@ -7366,8 +10474,8 @@
         </p:nvSpPr>
         <p:spPr>
           <a:xfrm>
-            <a:off x="1450000" y="3190000"/>
-            <a:ext cx="10500000" cy="550000"/>
+            <a:off x="1400000" y="2800000"/>
+            <a:ext cx="10550000" cy="620000"/>
           </a:xfrm>
           <a:prstGeom prst="rect">
             <a:avLst/>
@@ -7411,8 +10519,8 @@
         </p:nvSpPr>
         <p:spPr>
           <a:xfrm>
-            <a:off x="1650000" y="3190000"/>
-            <a:ext cx="10100000" cy="550000"/>
+            <a:off x="1600000" y="2800000"/>
+            <a:ext cx="10150000" cy="620000"/>
           </a:xfrm>
           <a:prstGeom prst="rect">
             <a:avLst/>
@@ -7435,7 +10543,7 @@
                 <a:ea typeface="Open Sans"/>
                 <a:cs typeface="Open Sans"/>
               </a:rPr>
-              <a:t>Удалите яд безопасным способом.</a:t>
+              <a:t>Выясните вещество, количество, путь поступления и время воздействия.</a:t>
             </a:r>
           </a:p>
         </p:txBody>
@@ -7448,8 +10556,8 @@
         </p:nvSpPr>
         <p:spPr>
           <a:xfrm>
-            <a:off x="700000" y="4060000"/>
-            <a:ext cx="550000" cy="550000"/>
+            <a:off x="700000" y="3500000"/>
+            <a:ext cx="500000" cy="500000"/>
           </a:xfrm>
           <a:prstGeom prst="ellipse">
             <a:avLst/>
@@ -7491,8 +10599,8 @@
         </p:nvSpPr>
         <p:spPr>
           <a:xfrm>
-            <a:off x="700000" y="4060000"/>
-            <a:ext cx="550000" cy="550000"/>
+            <a:off x="700000" y="3500000"/>
+            <a:ext cx="500000" cy="500000"/>
           </a:xfrm>
           <a:prstGeom prst="rect">
             <a:avLst/>
@@ -7507,7 +10615,7 @@
           <a:p>
             <a:pPr algn="ctr"/>
             <a:r>
-              <a:rPr sz="1400" b="1">
+              <a:rPr sz="1300" b="1">
                 <a:solidFill>
                   <a:srgbClr val="FFFFFF"/>
                 </a:solidFill>
@@ -7528,8 +10636,8 @@
         </p:nvSpPr>
         <p:spPr>
           <a:xfrm>
-            <a:off x="1450000" y="4060000"/>
-            <a:ext cx="10500000" cy="550000"/>
+            <a:off x="1400000" y="3500000"/>
+            <a:ext cx="10550000" cy="620000"/>
           </a:xfrm>
           <a:prstGeom prst="rect">
             <a:avLst/>
@@ -7573,8 +10681,8 @@
         </p:nvSpPr>
         <p:spPr>
           <a:xfrm>
-            <a:off x="1650000" y="4060000"/>
-            <a:ext cx="10100000" cy="550000"/>
+            <a:off x="1600000" y="3500000"/>
+            <a:ext cx="10150000" cy="620000"/>
           </a:xfrm>
           <a:prstGeom prst="rect">
             <a:avLst/>
@@ -7597,7 +10705,7 @@
                 <a:ea typeface="Open Sans"/>
                 <a:cs typeface="Open Sans"/>
               </a:rPr>
-              <a:t>Оцените сознание и дыхание.</a:t>
+              <a:t>Оцените сознание и нормальное дыхание; будьте готовы к реанимации.</a:t>
             </a:r>
           </a:p>
         </p:txBody>
@@ -7610,8 +10718,8 @@
         </p:nvSpPr>
         <p:spPr>
           <a:xfrm>
-            <a:off x="700000" y="4930000"/>
-            <a:ext cx="550000" cy="550000"/>
+            <a:off x="700000" y="4200000"/>
+            <a:ext cx="500000" cy="500000"/>
           </a:xfrm>
           <a:prstGeom prst="ellipse">
             <a:avLst/>
@@ -7653,8 +10761,8 @@
         </p:nvSpPr>
         <p:spPr>
           <a:xfrm>
-            <a:off x="700000" y="4930000"/>
-            <a:ext cx="550000" cy="550000"/>
+            <a:off x="700000" y="4200000"/>
+            <a:ext cx="500000" cy="500000"/>
           </a:xfrm>
           <a:prstGeom prst="rect">
             <a:avLst/>
@@ -7669,7 +10777,7 @@
           <a:p>
             <a:pPr algn="ctr"/>
             <a:r>
-              <a:rPr sz="1400" b="1">
+              <a:rPr sz="1300" b="1">
                 <a:solidFill>
                   <a:srgbClr val="FFFFFF"/>
                 </a:solidFill>
@@ -7690,8 +10798,8 @@
         </p:nvSpPr>
         <p:spPr>
           <a:xfrm>
-            <a:off x="1450000" y="4930000"/>
-            <a:ext cx="10500000" cy="550000"/>
+            <a:off x="1400000" y="4200000"/>
+            <a:ext cx="10550000" cy="620000"/>
           </a:xfrm>
           <a:prstGeom prst="rect">
             <a:avLst/>
@@ -7735,8 +10843,8 @@
         </p:nvSpPr>
         <p:spPr>
           <a:xfrm>
-            <a:off x="1650000" y="4930000"/>
-            <a:ext cx="10100000" cy="550000"/>
+            <a:off x="1600000" y="4200000"/>
+            <a:ext cx="10150000" cy="620000"/>
           </a:xfrm>
           <a:prstGeom prst="rect">
             <a:avLst/>
@@ -7759,7 +10867,7 @@
                 <a:ea typeface="Open Sans"/>
                 <a:cs typeface="Open Sans"/>
               </a:rPr>
-              <a:t>Вызовите скорую медицинскую помощь.</a:t>
+              <a:t>Вызовите скорую медицинскую помощь и выполняйте указания диспетчера.</a:t>
             </a:r>
           </a:p>
         </p:txBody>
@@ -7772,8 +10880,8 @@
         </p:nvSpPr>
         <p:spPr>
           <a:xfrm>
-            <a:off x="700000" y="5800000"/>
-            <a:ext cx="550000" cy="550000"/>
+            <a:off x="700000" y="4900000"/>
+            <a:ext cx="500000" cy="500000"/>
           </a:xfrm>
           <a:prstGeom prst="ellipse">
             <a:avLst/>
@@ -7815,8 +10923,8 @@
         </p:nvSpPr>
         <p:spPr>
           <a:xfrm>
-            <a:off x="700000" y="5800000"/>
-            <a:ext cx="550000" cy="550000"/>
+            <a:off x="700000" y="4900000"/>
+            <a:ext cx="500000" cy="500000"/>
           </a:xfrm>
           <a:prstGeom prst="rect">
             <a:avLst/>
@@ -7831,7 +10939,7 @@
           <a:p>
             <a:pPr algn="ctr"/>
             <a:r>
-              <a:rPr sz="1400" b="1">
+              <a:rPr sz="1300" b="1">
                 <a:solidFill>
                   <a:srgbClr val="FFFFFF"/>
                 </a:solidFill>
@@ -7852,8 +10960,8 @@
         </p:nvSpPr>
         <p:spPr>
           <a:xfrm>
-            <a:off x="1450000" y="5800000"/>
-            <a:ext cx="10500000" cy="550000"/>
+            <a:off x="1400000" y="4900000"/>
+            <a:ext cx="10550000" cy="620000"/>
           </a:xfrm>
           <a:prstGeom prst="rect">
             <a:avLst/>
@@ -7897,8 +11005,8 @@
         </p:nvSpPr>
         <p:spPr>
           <a:xfrm>
-            <a:off x="1650000" y="5800000"/>
-            <a:ext cx="10100000" cy="550000"/>
+            <a:off x="1600000" y="4900000"/>
+            <a:ext cx="10150000" cy="620000"/>
           </a:xfrm>
           <a:prstGeom prst="rect">
             <a:avLst/>
@@ -7921,7 +11029,87 @@
                 <a:ea typeface="Open Sans"/>
                 <a:cs typeface="Open Sans"/>
               </a:rPr>
-              <a:t>Сохраните упаковку или сведения о веществе.</a:t>
+              <a:t>Сохраните упаковку, этикетку, образец или фотографию вещества.</a:t>
+            </a:r>
+          </a:p>
+        </p:txBody>
+      </p:sp>
+      <p:sp>
+        <p:nvSpPr>
+          <p:cNvPr id="32" name="Rounded Rectangle 31"/>
+          <p:cNvSpPr/>
+          <p:nvPr/>
+        </p:nvSpPr>
+        <p:spPr>
+          <a:xfrm>
+            <a:off x="700000" y="5800000"/>
+            <a:ext cx="11000000" cy="900000"/>
+          </a:xfrm>
+          <a:prstGeom prst="roundRect">
+            <a:avLst/>
+          </a:prstGeom>
+          <a:solidFill>
+            <a:srgbClr val="F5F0E1"/>
+          </a:solidFill>
+          <a:ln>
+            <a:noFill/>
+          </a:ln>
+        </p:spPr>
+        <p:style>
+          <a:lnRef idx="1">
+            <a:schemeClr val="accent1"/>
+          </a:lnRef>
+          <a:fillRef idx="3">
+            <a:schemeClr val="accent1"/>
+          </a:fillRef>
+          <a:effectRef idx="2">
+            <a:schemeClr val="accent1"/>
+          </a:effectRef>
+          <a:fontRef idx="minor">
+            <a:schemeClr val="lt1"/>
+          </a:fontRef>
+        </p:style>
+        <p:txBody>
+          <a:bodyPr rtlCol="0" anchor="ctr"/>
+          <a:lstStyle/>
+          <a:p>
+            <a:pPr algn="ctr"/>
+          </a:p>
+        </p:txBody>
+      </p:sp>
+      <p:sp>
+        <p:nvSpPr>
+          <p:cNvPr id="33" name="TextBox 32"/>
+          <p:cNvSpPr txBox="1"/>
+          <p:nvPr/>
+        </p:nvSpPr>
+        <p:spPr>
+          <a:xfrm>
+            <a:off x="950000" y="6000000"/>
+            <a:ext cx="10500000" cy="500000"/>
+          </a:xfrm>
+          <a:prstGeom prst="rect">
+            <a:avLst/>
+          </a:prstGeom>
+          <a:noFill/>
+        </p:spPr>
+        <p:txBody>
+          <a:bodyPr wrap="square" anchor="ctr">
+            <a:spAutoFit/>
+          </a:bodyPr>
+          <a:lstStyle/>
+          <a:p>
+            <a:pPr algn="l"/>
+            <a:r>
+              <a:rPr sz="1200" b="0">
+                <a:solidFill>
+                  <a:srgbClr val="333333"/>
+                </a:solidFill>
+                <a:latin typeface="Open Sans"/>
+                <a:ea typeface="Open Sans"/>
+                <a:cs typeface="Open Sans"/>
+              </a:rPr>
+              <a:t>Не пробуйте вещество на вкус и не входите в загрязненную зону без подходящей защиты.</a:t>
             </a:r>
           </a:p>
         </p:txBody>
@@ -8019,7 +11207,7 @@
                 <a:ea typeface="Open Sans"/>
                 <a:cs typeface="Open Sans"/>
               </a:rPr>
-              <a:t>ЯД ПОСТУПИЛ ЧЕРЕЗ РОТ</a:t>
+              <a:t>ЕСЛИ ЯД ПОСТУПИЛ ЧЕРЕЗ РОТ</a:t>
             </a:r>
           </a:p>
         </p:txBody>
@@ -8192,8 +11380,8 @@
         </p:nvSpPr>
         <p:spPr>
           <a:xfrm>
-            <a:off x="700000" y="1500000"/>
-            <a:ext cx="11000000" cy="4200000"/>
+            <a:off x="700000" y="1450000"/>
+            <a:ext cx="11000000" cy="4000000"/>
           </a:xfrm>
           <a:prstGeom prst="rect">
             <a:avLst/>
@@ -8220,7 +11408,7 @@
                 <a:ea typeface="Open Sans"/>
                 <a:cs typeface="Open Sans"/>
               </a:rPr>
-              <a:t>•  Прополощите рот водой</a:t>
+              <a:t>•  Удалите остатки вещества изо рта и предложите прополоскать рот водой.</a:t>
             </a:r>
           </a:p>
           <a:p>
@@ -8238,7 +11426,7 @@
                 <a:ea typeface="Open Sans"/>
                 <a:cs typeface="Open Sans"/>
               </a:rPr>
-              <a:t>•  При сохраненном сознании рвоту вызывают приемом воды</a:t>
+              <a:t>•  Уточните название, примерное количество и время приема.</a:t>
             </a:r>
           </a:p>
           <a:p>
@@ -8248,15 +11436,15 @@
               </a:spcAft>
             </a:pPr>
             <a:r>
-              <a:rPr sz="1400" b="1">
-                <a:solidFill>
-                  <a:srgbClr val="CC0000"/>
-                </a:solidFill>
-                <a:latin typeface="Open Sans"/>
-                <a:ea typeface="Open Sans"/>
-                <a:cs typeface="Open Sans"/>
-              </a:rPr>
-              <a:t>•  Не вызывайте рвоту у человека без сознания</a:t>
+              <a:rPr sz="1400" b="0">
+                <a:solidFill>
+                  <a:srgbClr val="333333"/>
+                </a:solidFill>
+                <a:latin typeface="Open Sans"/>
+                <a:ea typeface="Open Sans"/>
+                <a:cs typeface="Open Sans"/>
+              </a:rPr>
+              <a:t>•  Не давайте «противоядия», лекарства, молоко или пищу по собственной инициативе.</a:t>
             </a:r>
           </a:p>
           <a:p>
@@ -8266,15 +11454,15 @@
               </a:spcAft>
             </a:pPr>
             <a:r>
-              <a:rPr sz="1400" b="1">
-                <a:solidFill>
-                  <a:srgbClr val="CC0000"/>
-                </a:solidFill>
-                <a:latin typeface="Open Sans"/>
-                <a:ea typeface="Open Sans"/>
-                <a:cs typeface="Open Sans"/>
-              </a:rPr>
-              <a:t>•  Не вызывайте рвоту при ожоге пищевода</a:t>
+              <a:rPr sz="1400" b="0">
+                <a:solidFill>
+                  <a:srgbClr val="333333"/>
+                </a:solidFill>
+                <a:latin typeface="Open Sans"/>
+                <a:ea typeface="Open Sans"/>
+                <a:cs typeface="Open Sans"/>
+              </a:rPr>
+              <a:t>•  Рвоту допустимо вызывать только у человека в полном сознании и когда это разрешено для данного вещества.</a:t>
             </a:r>
           </a:p>
           <a:p>
@@ -8292,7 +11480,105 @@
                 <a:ea typeface="Open Sans"/>
                 <a:cs typeface="Open Sans"/>
               </a:rPr>
-              <a:t>•  Контролируйте сознание и дыхание</a:t>
+              <a:t>•  Следуйте указаниям диспетчера скорой помощи или специалиста токсикологической службы.</a:t>
+            </a:r>
+          </a:p>
+          <a:p>
+            <a:pPr algn="l">
+              <a:spcAft>
+                <a:spcPts val="800"/>
+              </a:spcAft>
+            </a:pPr>
+            <a:r>
+              <a:rPr sz="1400" b="0">
+                <a:solidFill>
+                  <a:srgbClr val="333333"/>
+                </a:solidFill>
+                <a:latin typeface="Open Sans"/>
+                <a:ea typeface="Open Sans"/>
+                <a:cs typeface="Open Sans"/>
+              </a:rPr>
+              <a:t>•  После рвоты продолжайте контролировать сознание и дыхание.</a:t>
+            </a:r>
+          </a:p>
+        </p:txBody>
+      </p:sp>
+      <p:sp>
+        <p:nvSpPr>
+          <p:cNvPr id="9" name="Rounded Rectangle 8"/>
+          <p:cNvSpPr/>
+          <p:nvPr/>
+        </p:nvSpPr>
+        <p:spPr>
+          <a:xfrm>
+            <a:off x="700000" y="5600000"/>
+            <a:ext cx="11000000" cy="1000000"/>
+          </a:xfrm>
+          <a:prstGeom prst="roundRect">
+            <a:avLst/>
+          </a:prstGeom>
+          <a:solidFill>
+            <a:srgbClr val="F5F0E1"/>
+          </a:solidFill>
+          <a:ln>
+            <a:noFill/>
+          </a:ln>
+        </p:spPr>
+        <p:style>
+          <a:lnRef idx="1">
+            <a:schemeClr val="accent1"/>
+          </a:lnRef>
+          <a:fillRef idx="3">
+            <a:schemeClr val="accent1"/>
+          </a:fillRef>
+          <a:effectRef idx="2">
+            <a:schemeClr val="accent1"/>
+          </a:effectRef>
+          <a:fontRef idx="minor">
+            <a:schemeClr val="lt1"/>
+          </a:fontRef>
+        </p:style>
+        <p:txBody>
+          <a:bodyPr rtlCol="0" anchor="ctr"/>
+          <a:lstStyle/>
+          <a:p>
+            <a:pPr algn="ctr"/>
+          </a:p>
+        </p:txBody>
+      </p:sp>
+      <p:sp>
+        <p:nvSpPr>
+          <p:cNvPr id="10" name="TextBox 9"/>
+          <p:cNvSpPr txBox="1"/>
+          <p:nvPr/>
+        </p:nvSpPr>
+        <p:spPr>
+          <a:xfrm>
+            <a:off x="950000" y="5800000"/>
+            <a:ext cx="10500000" cy="600000"/>
+          </a:xfrm>
+          <a:prstGeom prst="rect">
+            <a:avLst/>
+          </a:prstGeom>
+          <a:noFill/>
+        </p:spPr>
+        <p:txBody>
+          <a:bodyPr wrap="square" anchor="ctr">
+            <a:spAutoFit/>
+          </a:bodyPr>
+          <a:lstStyle/>
+          <a:p>
+            <a:pPr algn="l"/>
+            <a:r>
+              <a:rPr sz="1200" b="0">
+                <a:solidFill>
+                  <a:srgbClr val="333333"/>
+                </a:solidFill>
+                <a:latin typeface="Open Sans"/>
+                <a:ea typeface="Open Sans"/>
+                <a:cs typeface="Open Sans"/>
+              </a:rPr>
+              <a:t>Самопроизвольные рвотные массы сохраните для осмотра только если это можно сделать безопасно.</a:t>
             </a:r>
           </a:p>
         </p:txBody>
@@ -8390,7 +11676,7 @@
                 <a:ea typeface="Open Sans"/>
                 <a:cs typeface="Open Sans"/>
               </a:rPr>
-              <a:t>ЧЕРЕЗ ВОЗДУХ ИЛИ КОЖУ</a:t>
+              <a:t>КОГДА РВОТУ ВЫЗЫВАТЬ НЕЛЬЗЯ</a:t>
             </a:r>
           </a:p>
         </p:txBody>
@@ -8564,81 +11850,7 @@
         <p:spPr>
           <a:xfrm>
             <a:off x="700000" y="1450000"/>
-            <a:ext cx="5400000" cy="400000"/>
-          </a:xfrm>
-          <a:prstGeom prst="rect">
-            <a:avLst/>
-          </a:prstGeom>
-          <a:noFill/>
-        </p:spPr>
-        <p:txBody>
-          <a:bodyPr wrap="square" anchor="t">
-            <a:spAutoFit/>
-          </a:bodyPr>
-          <a:lstStyle/>
-          <a:p>
-            <a:pPr algn="l"/>
-            <a:r>
-              <a:rPr sz="1400" b="1">
-                <a:solidFill>
-                  <a:srgbClr val="333333"/>
-                </a:solidFill>
-                <a:latin typeface="Open Sans"/>
-                <a:ea typeface="Open Sans"/>
-                <a:cs typeface="Open Sans"/>
-              </a:rPr>
-              <a:t>Вдыхание</a:t>
-            </a:r>
-          </a:p>
-        </p:txBody>
-      </p:sp>
-      <p:sp>
-        <p:nvSpPr>
-          <p:cNvPr id="9" name="TextBox 8"/>
-          <p:cNvSpPr txBox="1"/>
-          <p:nvPr/>
-        </p:nvSpPr>
-        <p:spPr>
-          <a:xfrm>
-            <a:off x="6600000" y="1450000"/>
-            <a:ext cx="5400000" cy="400000"/>
-          </a:xfrm>
-          <a:prstGeom prst="rect">
-            <a:avLst/>
-          </a:prstGeom>
-          <a:noFill/>
-        </p:spPr>
-        <p:txBody>
-          <a:bodyPr wrap="square" anchor="t">
-            <a:spAutoFit/>
-          </a:bodyPr>
-          <a:lstStyle/>
-          <a:p>
-            <a:pPr algn="l"/>
-            <a:r>
-              <a:rPr sz="1400" b="1">
-                <a:solidFill>
-                  <a:srgbClr val="333333"/>
-                </a:solidFill>
-                <a:latin typeface="Open Sans"/>
-                <a:ea typeface="Open Sans"/>
-                <a:cs typeface="Open Sans"/>
-              </a:rPr>
-              <a:t>Кожа</a:t>
-            </a:r>
-          </a:p>
-        </p:txBody>
-      </p:sp>
-      <p:sp>
-        <p:nvSpPr>
-          <p:cNvPr id="10" name="TextBox 9"/>
-          <p:cNvSpPr txBox="1"/>
-          <p:nvPr/>
-        </p:nvSpPr>
-        <p:spPr>
-          <a:xfrm>
-            <a:off x="700000" y="1950000"/>
-            <a:ext cx="5400000" cy="4000000"/>
+            <a:ext cx="11000000" cy="4000000"/>
           </a:xfrm>
           <a:prstGeom prst="rect">
             <a:avLst/>
@@ -8657,15 +11869,15 @@
               </a:spcAft>
             </a:pPr>
             <a:r>
-              <a:rPr sz="1300" b="0">
-                <a:solidFill>
-                  <a:srgbClr val="333333"/>
-                </a:solidFill>
-                <a:latin typeface="Open Sans"/>
-                <a:ea typeface="Open Sans"/>
-                <a:cs typeface="Open Sans"/>
-              </a:rPr>
-              <a:t>•  не входите в опасную зону без защиты</a:t>
+              <a:rPr sz="1400" b="1">
+                <a:solidFill>
+                  <a:srgbClr val="CC0000"/>
+                </a:solidFill>
+                <a:latin typeface="Open Sans"/>
+                <a:ea typeface="Open Sans"/>
+                <a:cs typeface="Open Sans"/>
+              </a:rPr>
+              <a:t>•  Пострадавший без сознания, резко заторможен или не может безопасно глотать</a:t>
             </a:r>
           </a:p>
           <a:p>
@@ -8675,15 +11887,15 @@
               </a:spcAft>
             </a:pPr>
             <a:r>
-              <a:rPr sz="1300" b="0">
-                <a:solidFill>
-                  <a:srgbClr val="333333"/>
-                </a:solidFill>
-                <a:latin typeface="Open Sans"/>
-                <a:ea typeface="Open Sans"/>
-                <a:cs typeface="Open Sans"/>
-              </a:rPr>
-              <a:t>•  выведите на свежий воздух</a:t>
+              <a:rPr sz="1400" b="1">
+                <a:solidFill>
+                  <a:srgbClr val="CC0000"/>
+                </a:solidFill>
+                <a:latin typeface="Open Sans"/>
+                <a:ea typeface="Open Sans"/>
+                <a:cs typeface="Open Sans"/>
+              </a:rPr>
+              <a:t>•  Есть судороги или высокая вероятность их возникновения</a:t>
             </a:r>
           </a:p>
           <a:p>
@@ -8693,15 +11905,15 @@
               </a:spcAft>
             </a:pPr>
             <a:r>
-              <a:rPr sz="1300" b="0">
-                <a:solidFill>
-                  <a:srgbClr val="333333"/>
-                </a:solidFill>
-                <a:latin typeface="Open Sans"/>
-                <a:ea typeface="Open Sans"/>
-                <a:cs typeface="Open Sans"/>
-              </a:rPr>
-              <a:t>•  ослабьте стесняющую одежду</a:t>
+              <a:rPr sz="1400" b="1">
+                <a:solidFill>
+                  <a:srgbClr val="CC0000"/>
+                </a:solidFill>
+                <a:latin typeface="Open Sans"/>
+                <a:ea typeface="Open Sans"/>
+                <a:cs typeface="Open Sans"/>
+              </a:rPr>
+              <a:t>•  Проглочены кислота, щелочь или другое прижигающее вещество</a:t>
             </a:r>
           </a:p>
           <a:p>
@@ -8711,40 +11923,17 @@
               </a:spcAft>
             </a:pPr>
             <a:r>
-              <a:rPr sz="1300" b="0">
-                <a:solidFill>
-                  <a:srgbClr val="333333"/>
-                </a:solidFill>
-                <a:latin typeface="Open Sans"/>
-                <a:ea typeface="Open Sans"/>
-                <a:cs typeface="Open Sans"/>
-              </a:rPr>
-              <a:t>•  контролируйте дыхание</a:t>
-            </a:r>
-          </a:p>
-        </p:txBody>
-      </p:sp>
-      <p:sp>
-        <p:nvSpPr>
-          <p:cNvPr id="11" name="TextBox 10"/>
-          <p:cNvSpPr txBox="1"/>
-          <p:nvPr/>
-        </p:nvSpPr>
-        <p:spPr>
-          <a:xfrm>
-            <a:off x="6600000" y="1950000"/>
-            <a:ext cx="5400000" cy="4000000"/>
-          </a:xfrm>
-          <a:prstGeom prst="rect">
-            <a:avLst/>
-          </a:prstGeom>
-          <a:noFill/>
-        </p:spPr>
-        <p:txBody>
-          <a:bodyPr wrap="square">
-            <a:spAutoFit/>
-          </a:bodyPr>
-          <a:lstStyle/>
+              <a:rPr sz="1400" b="1">
+                <a:solidFill>
+                  <a:srgbClr val="CC0000"/>
+                </a:solidFill>
+                <a:latin typeface="Open Sans"/>
+                <a:ea typeface="Open Sans"/>
+                <a:cs typeface="Open Sans"/>
+              </a:rPr>
+              <a:t>•  Проглочены нефтепродукты, способные попасть в дыхательные пути</a:t>
+            </a:r>
+          </a:p>
           <a:p>
             <a:pPr algn="l">
               <a:spcAft>
@@ -8752,7 +11941,87 @@
               </a:spcAft>
             </a:pPr>
             <a:r>
-              <a:rPr sz="1300" b="0">
+              <a:rPr sz="1400" b="1">
+                <a:solidFill>
+                  <a:srgbClr val="CC0000"/>
+                </a:solidFill>
+                <a:latin typeface="Open Sans"/>
+                <a:ea typeface="Open Sans"/>
+                <a:cs typeface="Open Sans"/>
+              </a:rPr>
+              <a:t>•  Неизвестно, какое вещество принято, или диспетчер запретил вызывать рвоту</a:t>
+            </a:r>
+          </a:p>
+        </p:txBody>
+      </p:sp>
+      <p:sp>
+        <p:nvSpPr>
+          <p:cNvPr id="9" name="Rounded Rectangle 8"/>
+          <p:cNvSpPr/>
+          <p:nvPr/>
+        </p:nvSpPr>
+        <p:spPr>
+          <a:xfrm>
+            <a:off x="700000" y="5600000"/>
+            <a:ext cx="11000000" cy="1000000"/>
+          </a:xfrm>
+          <a:prstGeom prst="roundRect">
+            <a:avLst/>
+          </a:prstGeom>
+          <a:solidFill>
+            <a:srgbClr val="F5F0E1"/>
+          </a:solidFill>
+          <a:ln>
+            <a:noFill/>
+          </a:ln>
+        </p:spPr>
+        <p:style>
+          <a:lnRef idx="1">
+            <a:schemeClr val="accent1"/>
+          </a:lnRef>
+          <a:fillRef idx="3">
+            <a:schemeClr val="accent1"/>
+          </a:fillRef>
+          <a:effectRef idx="2">
+            <a:schemeClr val="accent1"/>
+          </a:effectRef>
+          <a:fontRef idx="minor">
+            <a:schemeClr val="lt1"/>
+          </a:fontRef>
+        </p:style>
+        <p:txBody>
+          <a:bodyPr rtlCol="0" anchor="ctr"/>
+          <a:lstStyle/>
+          <a:p>
+            <a:pPr algn="ctr"/>
+          </a:p>
+        </p:txBody>
+      </p:sp>
+      <p:sp>
+        <p:nvSpPr>
+          <p:cNvPr id="10" name="TextBox 9"/>
+          <p:cNvSpPr txBox="1"/>
+          <p:nvPr/>
+        </p:nvSpPr>
+        <p:spPr>
+          <a:xfrm>
+            <a:off x="950000" y="5800000"/>
+            <a:ext cx="10500000" cy="600000"/>
+          </a:xfrm>
+          <a:prstGeom prst="rect">
+            <a:avLst/>
+          </a:prstGeom>
+          <a:noFill/>
+        </p:spPr>
+        <p:txBody>
+          <a:bodyPr wrap="square" anchor="ctr">
+            <a:spAutoFit/>
+          </a:bodyPr>
+          <a:lstStyle/>
+          <a:p>
+            <a:pPr algn="l"/>
+            <a:r>
+              <a:rPr sz="1200" b="0">
                 <a:solidFill>
                   <a:srgbClr val="333333"/>
                 </a:solidFill>
@@ -8760,61 +12029,7 @@
                 <a:ea typeface="Open Sans"/>
                 <a:cs typeface="Open Sans"/>
               </a:rPr>
-              <a:t>•  защитите свои руки</a:t>
-            </a:r>
-          </a:p>
-          <a:p>
-            <a:pPr algn="l">
-              <a:spcAft>
-                <a:spcPts val="800"/>
-              </a:spcAft>
-            </a:pPr>
-            <a:r>
-              <a:rPr sz="1300" b="0">
-                <a:solidFill>
-                  <a:srgbClr val="333333"/>
-                </a:solidFill>
-                <a:latin typeface="Open Sans"/>
-                <a:ea typeface="Open Sans"/>
-                <a:cs typeface="Open Sans"/>
-              </a:rPr>
-              <a:t>•  снимите загрязненную одежду</a:t>
-            </a:r>
-          </a:p>
-          <a:p>
-            <a:pPr algn="l">
-              <a:spcAft>
-                <a:spcPts val="800"/>
-              </a:spcAft>
-            </a:pPr>
-            <a:r>
-              <a:rPr sz="1300" b="0">
-                <a:solidFill>
-                  <a:srgbClr val="333333"/>
-                </a:solidFill>
-                <a:latin typeface="Open Sans"/>
-                <a:ea typeface="Open Sans"/>
-                <a:cs typeface="Open Sans"/>
-              </a:rPr>
-              <a:t>•  тщательно промойте кожу</a:t>
-            </a:r>
-          </a:p>
-          <a:p>
-            <a:pPr algn="l">
-              <a:spcAft>
-                <a:spcPts val="800"/>
-              </a:spcAft>
-            </a:pPr>
-            <a:r>
-              <a:rPr sz="1300" b="0">
-                <a:solidFill>
-                  <a:srgbClr val="333333"/>
-                </a:solidFill>
-                <a:latin typeface="Open Sans"/>
-                <a:ea typeface="Open Sans"/>
-                <a:cs typeface="Open Sans"/>
-              </a:rPr>
-              <a:t>•  наложите свободную повязку при повреждении</a:t>
+              <a:t>Попадание рвотных масс или химиката в дыхательные пути может быстро привести к тяжелому поражению.</a:t>
             </a:r>
           </a:p>
         </p:txBody>
@@ -8912,7 +12127,7 @@
                 <a:ea typeface="Open Sans"/>
                 <a:cs typeface="Open Sans"/>
               </a:rPr>
-              <a:t>ГЛАВНОЕ ЗАПОМНИТЬ</a:t>
+              <a:t>ОТРАВЛЕНИЕ ЧЕРЕЗ ДЫХАТЕЛЬНЫЕ ПУТИ</a:t>
             </a:r>
           </a:p>
         </p:txBody>
@@ -9079,14 +12294,94 @@
       </p:sp>
       <p:sp>
         <p:nvSpPr>
-          <p:cNvPr id="8" name="Rectangle 7"/>
+          <p:cNvPr id="8" name="Oval 7"/>
           <p:cNvSpPr/>
           <p:nvPr/>
         </p:nvSpPr>
         <p:spPr>
           <a:xfrm>
-            <a:off x="700000" y="1450000"/>
-            <a:ext cx="11000000" cy="833333"/>
+            <a:off x="700000" y="1400000"/>
+            <a:ext cx="500000" cy="500000"/>
+          </a:xfrm>
+          <a:prstGeom prst="ellipse">
+            <a:avLst/>
+          </a:prstGeom>
+          <a:solidFill>
+            <a:srgbClr val="CC0000"/>
+          </a:solidFill>
+          <a:ln>
+            <a:noFill/>
+          </a:ln>
+        </p:spPr>
+        <p:style>
+          <a:lnRef idx="1">
+            <a:schemeClr val="accent1"/>
+          </a:lnRef>
+          <a:fillRef idx="3">
+            <a:schemeClr val="accent1"/>
+          </a:fillRef>
+          <a:effectRef idx="2">
+            <a:schemeClr val="accent1"/>
+          </a:effectRef>
+          <a:fontRef idx="minor">
+            <a:schemeClr val="lt1"/>
+          </a:fontRef>
+        </p:style>
+        <p:txBody>
+          <a:bodyPr rtlCol="0" anchor="ctr"/>
+          <a:lstStyle/>
+          <a:p>
+            <a:pPr algn="ctr"/>
+          </a:p>
+        </p:txBody>
+      </p:sp>
+      <p:sp>
+        <p:nvSpPr>
+          <p:cNvPr id="9" name="TextBox 8"/>
+          <p:cNvSpPr txBox="1"/>
+          <p:nvPr/>
+        </p:nvSpPr>
+        <p:spPr>
+          <a:xfrm>
+            <a:off x="700000" y="1400000"/>
+            <a:ext cx="500000" cy="500000"/>
+          </a:xfrm>
+          <a:prstGeom prst="rect">
+            <a:avLst/>
+          </a:prstGeom>
+          <a:noFill/>
+        </p:spPr>
+        <p:txBody>
+          <a:bodyPr wrap="square" anchor="ctr">
+            <a:spAutoFit/>
+          </a:bodyPr>
+          <a:lstStyle/>
+          <a:p>
+            <a:pPr algn="ctr"/>
+            <a:r>
+              <a:rPr sz="1300" b="1">
+                <a:solidFill>
+                  <a:srgbClr val="FFFFFF"/>
+                </a:solidFill>
+                <a:latin typeface="Open Sans"/>
+                <a:ea typeface="Open Sans"/>
+                <a:cs typeface="Open Sans"/>
+              </a:rPr>
+              <a:t>1</a:t>
+            </a:r>
+          </a:p>
+        </p:txBody>
+      </p:sp>
+      <p:sp>
+        <p:nvSpPr>
+          <p:cNvPr id="10" name="Rectangle 9"/>
+          <p:cNvSpPr/>
+          <p:nvPr/>
+        </p:nvSpPr>
+        <p:spPr>
+          <a:xfrm>
+            <a:off x="1400000" y="1400000"/>
+            <a:ext cx="10550000" cy="620000"/>
           </a:xfrm>
           <a:prstGeom prst="rect">
             <a:avLst/>
@@ -9124,20 +12419,57 @@
       </p:sp>
       <p:sp>
         <p:nvSpPr>
-          <p:cNvPr id="9" name="Rectangle 8"/>
+          <p:cNvPr id="11" name="TextBox 10"/>
+          <p:cNvSpPr txBox="1"/>
+          <p:nvPr/>
+        </p:nvSpPr>
+        <p:spPr>
+          <a:xfrm>
+            <a:off x="1600000" y="1400000"/>
+            <a:ext cx="10150000" cy="620000"/>
+          </a:xfrm>
+          <a:prstGeom prst="rect">
+            <a:avLst/>
+          </a:prstGeom>
+          <a:noFill/>
+        </p:spPr>
+        <p:txBody>
+          <a:bodyPr wrap="square" anchor="ctr">
+            <a:spAutoFit/>
+          </a:bodyPr>
+          <a:lstStyle/>
+          <a:p>
+            <a:pPr algn="l"/>
+            <a:r>
+              <a:rPr sz="1300" b="0">
+                <a:solidFill>
+                  <a:srgbClr val="333333"/>
+                </a:solidFill>
+                <a:latin typeface="Open Sans"/>
+                <a:ea typeface="Open Sans"/>
+                <a:cs typeface="Open Sans"/>
+              </a:rPr>
+              <a:t>Не входите в помещение или зону, где воздух опасен, без специальной защиты.</a:t>
+            </a:r>
+          </a:p>
+        </p:txBody>
+      </p:sp>
+      <p:sp>
+        <p:nvSpPr>
+          <p:cNvPr id="12" name="Oval 11"/>
           <p:cNvSpPr/>
           <p:nvPr/>
         </p:nvSpPr>
         <p:spPr>
           <a:xfrm>
-            <a:off x="700000" y="1450000"/>
-            <a:ext cx="90000" cy="833333"/>
-          </a:xfrm>
-          <a:prstGeom prst="rect">
-            <a:avLst/>
-          </a:prstGeom>
-          <a:solidFill>
-            <a:srgbClr val="CC0000"/>
+            <a:off x="700000" y="2100000"/>
+            <a:ext cx="500000" cy="500000"/>
+          </a:xfrm>
+          <a:prstGeom prst="ellipse">
+            <a:avLst/>
+          </a:prstGeom>
+          <a:solidFill>
+            <a:srgbClr val="555555"/>
           </a:solidFill>
           <a:ln>
             <a:noFill/>
@@ -9167,14 +12499,14 @@
       </p:sp>
       <p:sp>
         <p:nvSpPr>
-          <p:cNvPr id="10" name="TextBox 9"/>
+          <p:cNvPr id="13" name="TextBox 12"/>
           <p:cNvSpPr txBox="1"/>
           <p:nvPr/>
         </p:nvSpPr>
         <p:spPr>
           <a:xfrm>
-            <a:off x="1000000" y="1550000"/>
-            <a:ext cx="10400000" cy="633333"/>
+            <a:off x="700000" y="2100000"/>
+            <a:ext cx="500000" cy="500000"/>
           </a:xfrm>
           <a:prstGeom prst="rect">
             <a:avLst/>
@@ -9187,31 +12519,31 @@
           </a:bodyPr>
           <a:lstStyle/>
           <a:p>
-            <a:pPr algn="l"/>
-            <a:r>
-              <a:rPr sz="1300" b="0">
-                <a:solidFill>
-                  <a:srgbClr val="333333"/>
-                </a:solidFill>
-                <a:latin typeface="Open Sans"/>
-                <a:ea typeface="Open Sans"/>
-                <a:cs typeface="Open Sans"/>
-              </a:rPr>
-              <a:t>Прекратите действие яда</a:t>
-            </a:r>
-          </a:p>
-        </p:txBody>
-      </p:sp>
-      <p:sp>
-        <p:nvSpPr>
-          <p:cNvPr id="11" name="Rectangle 10"/>
+            <a:pPr algn="ctr"/>
+            <a:r>
+              <a:rPr sz="1300" b="1">
+                <a:solidFill>
+                  <a:srgbClr val="FFFFFF"/>
+                </a:solidFill>
+                <a:latin typeface="Open Sans"/>
+                <a:ea typeface="Open Sans"/>
+                <a:cs typeface="Open Sans"/>
+              </a:rPr>
+              <a:t>2</a:t>
+            </a:r>
+          </a:p>
+        </p:txBody>
+      </p:sp>
+      <p:sp>
+        <p:nvSpPr>
+          <p:cNvPr id="14" name="Rectangle 13"/>
           <p:cNvSpPr/>
           <p:nvPr/>
         </p:nvSpPr>
         <p:spPr>
           <a:xfrm>
-            <a:off x="700000" y="2383333"/>
-            <a:ext cx="11000000" cy="833333"/>
+            <a:off x="1400000" y="2100000"/>
+            <a:ext cx="10550000" cy="620000"/>
           </a:xfrm>
           <a:prstGeom prst="rect">
             <a:avLst/>
@@ -9249,20 +12581,57 @@
       </p:sp>
       <p:sp>
         <p:nvSpPr>
-          <p:cNvPr id="12" name="Rectangle 11"/>
+          <p:cNvPr id="15" name="TextBox 14"/>
+          <p:cNvSpPr txBox="1"/>
+          <p:nvPr/>
+        </p:nvSpPr>
+        <p:spPr>
+          <a:xfrm>
+            <a:off x="1600000" y="2100000"/>
+            <a:ext cx="10150000" cy="620000"/>
+          </a:xfrm>
+          <a:prstGeom prst="rect">
+            <a:avLst/>
+          </a:prstGeom>
+          <a:noFill/>
+        </p:spPr>
+        <p:txBody>
+          <a:bodyPr wrap="square" anchor="ctr">
+            <a:spAutoFit/>
+          </a:bodyPr>
+          <a:lstStyle/>
+          <a:p>
+            <a:pPr algn="l"/>
+            <a:r>
+              <a:rPr sz="1300" b="0">
+                <a:solidFill>
+                  <a:srgbClr val="333333"/>
+                </a:solidFill>
+                <a:latin typeface="Open Sans"/>
+                <a:ea typeface="Open Sans"/>
+                <a:cs typeface="Open Sans"/>
+              </a:rPr>
+              <a:t>Вызовите аварийные службы и скорую медицинскую помощь.</a:t>
+            </a:r>
+          </a:p>
+        </p:txBody>
+      </p:sp>
+      <p:sp>
+        <p:nvSpPr>
+          <p:cNvPr id="16" name="Oval 15"/>
           <p:cNvSpPr/>
           <p:nvPr/>
         </p:nvSpPr>
         <p:spPr>
           <a:xfrm>
-            <a:off x="700000" y="2383333"/>
-            <a:ext cx="90000" cy="833333"/>
-          </a:xfrm>
-          <a:prstGeom prst="rect">
-            <a:avLst/>
-          </a:prstGeom>
-          <a:solidFill>
-            <a:srgbClr val="CC0000"/>
+            <a:off x="700000" y="2800000"/>
+            <a:ext cx="500000" cy="500000"/>
+          </a:xfrm>
+          <a:prstGeom prst="ellipse">
+            <a:avLst/>
+          </a:prstGeom>
+          <a:solidFill>
+            <a:srgbClr val="555555"/>
           </a:solidFill>
           <a:ln>
             <a:noFill/>
@@ -9292,14 +12661,14 @@
       </p:sp>
       <p:sp>
         <p:nvSpPr>
-          <p:cNvPr id="13" name="TextBox 12"/>
+          <p:cNvPr id="17" name="TextBox 16"/>
           <p:cNvSpPr txBox="1"/>
           <p:nvPr/>
         </p:nvSpPr>
         <p:spPr>
           <a:xfrm>
-            <a:off x="1000000" y="2483333"/>
-            <a:ext cx="10400000" cy="633333"/>
+            <a:off x="700000" y="2800000"/>
+            <a:ext cx="500000" cy="500000"/>
           </a:xfrm>
           <a:prstGeom prst="rect">
             <a:avLst/>
@@ -9312,31 +12681,31 @@
           </a:bodyPr>
           <a:lstStyle/>
           <a:p>
-            <a:pPr algn="l"/>
-            <a:r>
-              <a:rPr sz="1300" b="0">
-                <a:solidFill>
-                  <a:srgbClr val="333333"/>
-                </a:solidFill>
-                <a:latin typeface="Open Sans"/>
-                <a:ea typeface="Open Sans"/>
-                <a:cs typeface="Open Sans"/>
-              </a:rPr>
-              <a:t>Защитите себя</a:t>
-            </a:r>
-          </a:p>
-        </p:txBody>
-      </p:sp>
-      <p:sp>
-        <p:nvSpPr>
-          <p:cNvPr id="14" name="Rectangle 13"/>
+            <a:pPr algn="ctr"/>
+            <a:r>
+              <a:rPr sz="1300" b="1">
+                <a:solidFill>
+                  <a:srgbClr val="FFFFFF"/>
+                </a:solidFill>
+                <a:latin typeface="Open Sans"/>
+                <a:ea typeface="Open Sans"/>
+                <a:cs typeface="Open Sans"/>
+              </a:rPr>
+              <a:t>3</a:t>
+            </a:r>
+          </a:p>
+        </p:txBody>
+      </p:sp>
+      <p:sp>
+        <p:nvSpPr>
+          <p:cNvPr id="18" name="Rectangle 17"/>
           <p:cNvSpPr/>
           <p:nvPr/>
         </p:nvSpPr>
         <p:spPr>
           <a:xfrm>
-            <a:off x="700000" y="3316666"/>
-            <a:ext cx="11000000" cy="833333"/>
+            <a:off x="1400000" y="2800000"/>
+            <a:ext cx="10550000" cy="620000"/>
           </a:xfrm>
           <a:prstGeom prst="rect">
             <a:avLst/>
@@ -9374,20 +12743,57 @@
       </p:sp>
       <p:sp>
         <p:nvSpPr>
-          <p:cNvPr id="15" name="Rectangle 14"/>
+          <p:cNvPr id="19" name="TextBox 18"/>
+          <p:cNvSpPr txBox="1"/>
+          <p:nvPr/>
+        </p:nvSpPr>
+        <p:spPr>
+          <a:xfrm>
+            <a:off x="1600000" y="2800000"/>
+            <a:ext cx="10150000" cy="620000"/>
+          </a:xfrm>
+          <a:prstGeom prst="rect">
+            <a:avLst/>
+          </a:prstGeom>
+          <a:noFill/>
+        </p:spPr>
+        <p:txBody>
+          <a:bodyPr wrap="square" anchor="ctr">
+            <a:spAutoFit/>
+          </a:bodyPr>
+          <a:lstStyle/>
+          <a:p>
+            <a:pPr algn="l"/>
+            <a:r>
+              <a:rPr sz="1300" b="0">
+                <a:solidFill>
+                  <a:srgbClr val="333333"/>
+                </a:solidFill>
+                <a:latin typeface="Open Sans"/>
+                <a:ea typeface="Open Sans"/>
+                <a:cs typeface="Open Sans"/>
+              </a:rPr>
+              <a:t>Если это безопасно, прекратите источник и обеспечьте проветривание.</a:t>
+            </a:r>
+          </a:p>
+        </p:txBody>
+      </p:sp>
+      <p:sp>
+        <p:nvSpPr>
+          <p:cNvPr id="20" name="Oval 19"/>
           <p:cNvSpPr/>
           <p:nvPr/>
         </p:nvSpPr>
         <p:spPr>
           <a:xfrm>
-            <a:off x="700000" y="3316666"/>
-            <a:ext cx="90000" cy="833333"/>
-          </a:xfrm>
-          <a:prstGeom prst="rect">
-            <a:avLst/>
-          </a:prstGeom>
-          <a:solidFill>
-            <a:srgbClr val="CC0000"/>
+            <a:off x="700000" y="3500000"/>
+            <a:ext cx="500000" cy="500000"/>
+          </a:xfrm>
+          <a:prstGeom prst="ellipse">
+            <a:avLst/>
+          </a:prstGeom>
+          <a:solidFill>
+            <a:srgbClr val="555555"/>
           </a:solidFill>
           <a:ln>
             <a:noFill/>
@@ -9417,14 +12823,14 @@
       </p:sp>
       <p:sp>
         <p:nvSpPr>
-          <p:cNvPr id="16" name="TextBox 15"/>
+          <p:cNvPr id="21" name="TextBox 20"/>
           <p:cNvSpPr txBox="1"/>
           <p:nvPr/>
         </p:nvSpPr>
         <p:spPr>
           <a:xfrm>
-            <a:off x="1000000" y="3416666"/>
-            <a:ext cx="10400000" cy="633333"/>
+            <a:off x="700000" y="3500000"/>
+            <a:ext cx="500000" cy="500000"/>
           </a:xfrm>
           <a:prstGeom prst="rect">
             <a:avLst/>
@@ -9437,31 +12843,31 @@
           </a:bodyPr>
           <a:lstStyle/>
           <a:p>
-            <a:pPr algn="l"/>
-            <a:r>
-              <a:rPr sz="1300" b="0">
-                <a:solidFill>
-                  <a:srgbClr val="333333"/>
-                </a:solidFill>
-                <a:latin typeface="Open Sans"/>
-                <a:ea typeface="Open Sans"/>
-                <a:cs typeface="Open Sans"/>
-              </a:rPr>
-              <a:t>Узнайте: что, сколько и когда</a:t>
-            </a:r>
-          </a:p>
-        </p:txBody>
-      </p:sp>
-      <p:sp>
-        <p:nvSpPr>
-          <p:cNvPr id="17" name="Rectangle 16"/>
+            <a:pPr algn="ctr"/>
+            <a:r>
+              <a:rPr sz="1300" b="1">
+                <a:solidFill>
+                  <a:srgbClr val="FFFFFF"/>
+                </a:solidFill>
+                <a:latin typeface="Open Sans"/>
+                <a:ea typeface="Open Sans"/>
+                <a:cs typeface="Open Sans"/>
+              </a:rPr>
+              <a:t>4</a:t>
+            </a:r>
+          </a:p>
+        </p:txBody>
+      </p:sp>
+      <p:sp>
+        <p:nvSpPr>
+          <p:cNvPr id="22" name="Rectangle 21"/>
           <p:cNvSpPr/>
           <p:nvPr/>
         </p:nvSpPr>
         <p:spPr>
           <a:xfrm>
-            <a:off x="700000" y="4249999"/>
-            <a:ext cx="11000000" cy="833333"/>
+            <a:off x="1400000" y="3500000"/>
+            <a:ext cx="10550000" cy="620000"/>
           </a:xfrm>
           <a:prstGeom prst="rect">
             <a:avLst/>
@@ -9499,20 +12905,57 @@
       </p:sp>
       <p:sp>
         <p:nvSpPr>
-          <p:cNvPr id="18" name="Rectangle 17"/>
+          <p:cNvPr id="23" name="TextBox 22"/>
+          <p:cNvSpPr txBox="1"/>
+          <p:nvPr/>
+        </p:nvSpPr>
+        <p:spPr>
+          <a:xfrm>
+            <a:off x="1600000" y="3500000"/>
+            <a:ext cx="10150000" cy="620000"/>
+          </a:xfrm>
+          <a:prstGeom prst="rect">
+            <a:avLst/>
+          </a:prstGeom>
+          <a:noFill/>
+        </p:spPr>
+        <p:txBody>
+          <a:bodyPr wrap="square" anchor="ctr">
+            <a:spAutoFit/>
+          </a:bodyPr>
+          <a:lstStyle/>
+          <a:p>
+            <a:pPr algn="l"/>
+            <a:r>
+              <a:rPr sz="1300" b="0">
+                <a:solidFill>
+                  <a:srgbClr val="333333"/>
+                </a:solidFill>
+                <a:latin typeface="Open Sans"/>
+                <a:ea typeface="Open Sans"/>
+                <a:cs typeface="Open Sans"/>
+              </a:rPr>
+              <a:t>Выведите или вынесите пострадавшего на свежий воздух.</a:t>
+            </a:r>
+          </a:p>
+        </p:txBody>
+      </p:sp>
+      <p:sp>
+        <p:nvSpPr>
+          <p:cNvPr id="24" name="Oval 23"/>
           <p:cNvSpPr/>
           <p:nvPr/>
         </p:nvSpPr>
         <p:spPr>
           <a:xfrm>
-            <a:off x="700000" y="4249999"/>
-            <a:ext cx="90000" cy="833333"/>
-          </a:xfrm>
-          <a:prstGeom prst="rect">
-            <a:avLst/>
-          </a:prstGeom>
-          <a:solidFill>
-            <a:srgbClr val="CC0000"/>
+            <a:off x="700000" y="4200000"/>
+            <a:ext cx="500000" cy="500000"/>
+          </a:xfrm>
+          <a:prstGeom prst="ellipse">
+            <a:avLst/>
+          </a:prstGeom>
+          <a:solidFill>
+            <a:srgbClr val="555555"/>
           </a:solidFill>
           <a:ln>
             <a:noFill/>
@@ -9542,14 +12985,14 @@
       </p:sp>
       <p:sp>
         <p:nvSpPr>
-          <p:cNvPr id="19" name="TextBox 18"/>
+          <p:cNvPr id="25" name="TextBox 24"/>
           <p:cNvSpPr txBox="1"/>
           <p:nvPr/>
         </p:nvSpPr>
         <p:spPr>
           <a:xfrm>
-            <a:off x="1000000" y="4349999"/>
-            <a:ext cx="10400000" cy="633333"/>
+            <a:off x="700000" y="4200000"/>
+            <a:ext cx="500000" cy="500000"/>
           </a:xfrm>
           <a:prstGeom prst="rect">
             <a:avLst/>
@@ -9562,31 +13005,31 @@
           </a:bodyPr>
           <a:lstStyle/>
           <a:p>
-            <a:pPr algn="l"/>
-            <a:r>
-              <a:rPr sz="1300" b="0">
-                <a:solidFill>
-                  <a:srgbClr val="333333"/>
-                </a:solidFill>
-                <a:latin typeface="Open Sans"/>
-                <a:ea typeface="Open Sans"/>
-                <a:cs typeface="Open Sans"/>
-              </a:rPr>
-              <a:t>Проверьте сознание и дыхание</a:t>
-            </a:r>
-          </a:p>
-        </p:txBody>
-      </p:sp>
-      <p:sp>
-        <p:nvSpPr>
-          <p:cNvPr id="20" name="Rectangle 19"/>
+            <a:pPr algn="ctr"/>
+            <a:r>
+              <a:rPr sz="1300" b="1">
+                <a:solidFill>
+                  <a:srgbClr val="FFFFFF"/>
+                </a:solidFill>
+                <a:latin typeface="Open Sans"/>
+                <a:ea typeface="Open Sans"/>
+                <a:cs typeface="Open Sans"/>
+              </a:rPr>
+              <a:t>5</a:t>
+            </a:r>
+          </a:p>
+        </p:txBody>
+      </p:sp>
+      <p:sp>
+        <p:nvSpPr>
+          <p:cNvPr id="26" name="Rectangle 25"/>
           <p:cNvSpPr/>
           <p:nvPr/>
         </p:nvSpPr>
         <p:spPr>
           <a:xfrm>
-            <a:off x="700000" y="5183332"/>
-            <a:ext cx="11000000" cy="833333"/>
+            <a:off x="1400000" y="4200000"/>
+            <a:ext cx="10550000" cy="620000"/>
           </a:xfrm>
           <a:prstGeom prst="rect">
             <a:avLst/>
@@ -9624,20 +13067,57 @@
       </p:sp>
       <p:sp>
         <p:nvSpPr>
-          <p:cNvPr id="21" name="Rectangle 20"/>
+          <p:cNvPr id="27" name="TextBox 26"/>
+          <p:cNvSpPr txBox="1"/>
+          <p:nvPr/>
+        </p:nvSpPr>
+        <p:spPr>
+          <a:xfrm>
+            <a:off x="1600000" y="4200000"/>
+            <a:ext cx="10150000" cy="620000"/>
+          </a:xfrm>
+          <a:prstGeom prst="rect">
+            <a:avLst/>
+          </a:prstGeom>
+          <a:noFill/>
+        </p:spPr>
+        <p:txBody>
+          <a:bodyPr wrap="square" anchor="ctr">
+            <a:spAutoFit/>
+          </a:bodyPr>
+          <a:lstStyle/>
+          <a:p>
+            <a:pPr algn="l"/>
+            <a:r>
+              <a:rPr sz="1300" b="0">
+                <a:solidFill>
+                  <a:srgbClr val="333333"/>
+                </a:solidFill>
+                <a:latin typeface="Open Sans"/>
+                <a:ea typeface="Open Sans"/>
+                <a:cs typeface="Open Sans"/>
+              </a:rPr>
+              <a:t>Ослабьте стесняющую одежду и оцените сознание и дыхание.</a:t>
+            </a:r>
+          </a:p>
+        </p:txBody>
+      </p:sp>
+      <p:sp>
+        <p:nvSpPr>
+          <p:cNvPr id="28" name="Oval 27"/>
           <p:cNvSpPr/>
           <p:nvPr/>
         </p:nvSpPr>
         <p:spPr>
           <a:xfrm>
-            <a:off x="700000" y="5183332"/>
-            <a:ext cx="90000" cy="833333"/>
-          </a:xfrm>
-          <a:prstGeom prst="rect">
-            <a:avLst/>
-          </a:prstGeom>
-          <a:solidFill>
-            <a:srgbClr val="CC0000"/>
+            <a:off x="700000" y="4900000"/>
+            <a:ext cx="500000" cy="500000"/>
+          </a:xfrm>
+          <a:prstGeom prst="ellipse">
+            <a:avLst/>
+          </a:prstGeom>
+          <a:solidFill>
+            <a:srgbClr val="555555"/>
           </a:solidFill>
           <a:ln>
             <a:noFill/>
@@ -9667,14 +13147,14 @@
       </p:sp>
       <p:sp>
         <p:nvSpPr>
-          <p:cNvPr id="22" name="TextBox 21"/>
+          <p:cNvPr id="29" name="TextBox 28"/>
           <p:cNvSpPr txBox="1"/>
           <p:nvPr/>
         </p:nvSpPr>
         <p:spPr>
           <a:xfrm>
-            <a:off x="1000000" y="5283332"/>
-            <a:ext cx="10400000" cy="633333"/>
+            <a:off x="700000" y="4900000"/>
+            <a:ext cx="500000" cy="500000"/>
           </a:xfrm>
           <a:prstGeom prst="rect">
             <a:avLst/>
@@ -9687,31 +13167,31 @@
           </a:bodyPr>
           <a:lstStyle/>
           <a:p>
-            <a:pPr algn="l"/>
-            <a:r>
-              <a:rPr sz="1300" b="0">
-                <a:solidFill>
-                  <a:srgbClr val="333333"/>
-                </a:solidFill>
-                <a:latin typeface="Open Sans"/>
-                <a:ea typeface="Open Sans"/>
-                <a:cs typeface="Open Sans"/>
-              </a:rPr>
-              <a:t>Без сознания рвоту не вызывают</a:t>
-            </a:r>
-          </a:p>
-        </p:txBody>
-      </p:sp>
-      <p:sp>
-        <p:nvSpPr>
-          <p:cNvPr id="23" name="Rectangle 22"/>
+            <a:pPr algn="ctr"/>
+            <a:r>
+              <a:rPr sz="1300" b="1">
+                <a:solidFill>
+                  <a:srgbClr val="FFFFFF"/>
+                </a:solidFill>
+                <a:latin typeface="Open Sans"/>
+                <a:ea typeface="Open Sans"/>
+                <a:cs typeface="Open Sans"/>
+              </a:rPr>
+              <a:t>6</a:t>
+            </a:r>
+          </a:p>
+        </p:txBody>
+      </p:sp>
+      <p:sp>
+        <p:nvSpPr>
+          <p:cNvPr id="30" name="Rectangle 29"/>
           <p:cNvSpPr/>
           <p:nvPr/>
         </p:nvSpPr>
         <p:spPr>
           <a:xfrm>
-            <a:off x="700000" y="6116665"/>
-            <a:ext cx="11000000" cy="833333"/>
+            <a:off x="1400000" y="4900000"/>
+            <a:ext cx="10550000" cy="620000"/>
           </a:xfrm>
           <a:prstGeom prst="rect">
             <a:avLst/>
@@ -9749,20 +13229,57 @@
       </p:sp>
       <p:sp>
         <p:nvSpPr>
-          <p:cNvPr id="24" name="Rectangle 23"/>
+          <p:cNvPr id="31" name="TextBox 30"/>
+          <p:cNvSpPr txBox="1"/>
+          <p:nvPr/>
+        </p:nvSpPr>
+        <p:spPr>
+          <a:xfrm>
+            <a:off x="1600000" y="4900000"/>
+            <a:ext cx="10150000" cy="620000"/>
+          </a:xfrm>
+          <a:prstGeom prst="rect">
+            <a:avLst/>
+          </a:prstGeom>
+          <a:noFill/>
+        </p:spPr>
+        <p:txBody>
+          <a:bodyPr wrap="square" anchor="ctr">
+            <a:spAutoFit/>
+          </a:bodyPr>
+          <a:lstStyle/>
+          <a:p>
+            <a:pPr algn="l"/>
+            <a:r>
+              <a:rPr sz="1300" b="0">
+                <a:solidFill>
+                  <a:srgbClr val="333333"/>
+                </a:solidFill>
+                <a:latin typeface="Open Sans"/>
+                <a:ea typeface="Open Sans"/>
+                <a:cs typeface="Open Sans"/>
+              </a:rPr>
+              <a:t>При отсутствии нормального дыхания начинайте реанимацию, учитывая безопасность вдохов.</a:t>
+            </a:r>
+          </a:p>
+        </p:txBody>
+      </p:sp>
+      <p:sp>
+        <p:nvSpPr>
+          <p:cNvPr id="32" name="Rounded Rectangle 31"/>
           <p:cNvSpPr/>
           <p:nvPr/>
         </p:nvSpPr>
         <p:spPr>
           <a:xfrm>
-            <a:off x="700000" y="6116665"/>
-            <a:ext cx="90000" cy="833333"/>
-          </a:xfrm>
-          <a:prstGeom prst="rect">
-            <a:avLst/>
-          </a:prstGeom>
-          <a:solidFill>
-            <a:srgbClr val="CC0000"/>
+            <a:off x="700000" y="5800000"/>
+            <a:ext cx="11000000" cy="900000"/>
+          </a:xfrm>
+          <a:prstGeom prst="roundRect">
+            <a:avLst/>
+          </a:prstGeom>
+          <a:solidFill>
+            <a:srgbClr val="F5F0E1"/>
           </a:solidFill>
           <a:ln>
             <a:noFill/>
@@ -9792,14 +13309,14 @@
       </p:sp>
       <p:sp>
         <p:nvSpPr>
-          <p:cNvPr id="25" name="TextBox 24"/>
+          <p:cNvPr id="33" name="TextBox 32"/>
           <p:cNvSpPr txBox="1"/>
           <p:nvPr/>
         </p:nvSpPr>
         <p:spPr>
           <a:xfrm>
-            <a:off x="1000000" y="6216665"/>
-            <a:ext cx="10400000" cy="633333"/>
+            <a:off x="950000" y="6000000"/>
+            <a:ext cx="10500000" cy="500000"/>
           </a:xfrm>
           <a:prstGeom prst="rect">
             <a:avLst/>
@@ -9814,7 +13331,7 @@
           <a:p>
             <a:pPr algn="l"/>
             <a:r>
-              <a:rPr sz="1300" b="0">
+              <a:rPr sz="1200" b="0">
                 <a:solidFill>
                   <a:srgbClr val="333333"/>
                 </a:solidFill>
@@ -9822,7 +13339,7 @@
                 <a:ea typeface="Open Sans"/>
                 <a:cs typeface="Open Sans"/>
               </a:rPr>
-              <a:t>Сохраните упаковку вещества</a:t>
+              <a:t>При угарном газе обычная тканевая маска не защищает оказывающего помощь.</a:t>
             </a:r>
           </a:p>
         </p:txBody>
